--- a/tutor-time/movement-and-mental-health/downloads/Movement_and_Mental_Health_Lesson_2.pptx
+++ b/tutor-time/movement-and-mental-health/downloads/Movement_and_Mental_Health_Lesson_2.pptx
@@ -5689,7 +5689,7 @@
                 </a:solidFill>
                 <a:latin typeface="Karla"/>
               </a:rPr>
-              <a:t>The movers' attention went up. The others' went slightly down.</a:t>
+              <a:t>The movers’ attention went up. The others’ went slightly down.</a:t>
             </a:r>
           </a:p>
         </p:txBody>
@@ -9712,7 +9712,7 @@
                 </a:solidFill>
                 <a:latin typeface="Karla"/>
               </a:rPr>
-              <a:t>Would you have done that five minutes if nobody had told you to?</a:t>
+              <a:t>Would you have done those five minutes if nobody had told you to?</a:t>
             </a:r>
           </a:p>
         </p:txBody>
@@ -12614,7 +12614,7 @@
                 </a:solidFill>
                 <a:latin typeface="Karla"/>
               </a:rPr>
-              <a:t>Pulse and focus, before and after. You are collecting class averages.</a:t>
+              <a:t>Pulse change and focus change. You are tallying bands, not averages.</a:t>
             </a:r>
           </a:p>
         </p:txBody>
@@ -12832,7 +12832,7 @@
                 </a:solidFill>
                 <a:latin typeface="Karla"/>
               </a:rPr>
-              <a:t>Asthma, injuries, anything that makes this a bad idea. Not what they remember today.</a:t>
+              <a:t>Asthma, injuries, anything that makes this a bad idea. Check records, not memories.</a:t>
             </a:r>
           </a:p>
         </p:txBody>
@@ -16636,7 +16636,7 @@
                 </a:solidFill>
                 <a:latin typeface="Karla"/>
               </a:rPr>
-              <a:t>The quietest, and the seated one.</a:t>
+              <a:t>Quiet, and easy to do seated.</a:t>
             </a:r>
           </a:p>
         </p:txBody>
@@ -17808,7 +17808,7 @@
                 </a:solidFill>
                 <a:latin typeface="Karla"/>
               </a:rPr>
-              <a:t>Nobody has to be good at this. You only have to still be doing it in five minutes.</a:t>
+              <a:t>Nobody has to be good at this. You only have to keep going for five minutes.</a:t>
             </a:r>
           </a:p>
         </p:txBody>
@@ -18330,7 +18330,7 @@
                 </a:solidFill>
                 <a:latin typeface="Karla"/>
               </a:rPr>
-              <a:t>Keep going. Slowing down is fine, stopping is not.</a:t>
+              <a:t>Keep going. Slow down if you need to. Stop if it hurts.</a:t>
             </a:r>
           </a:p>
         </p:txBody>
@@ -19310,7 +19310,7 @@
                 </a:solidFill>
                 <a:latin typeface="Karla"/>
               </a:rPr>
-              <a:t>The one word is the useful part, because nobody can argue with the first word you thought of.</a:t>
+              <a:t>The one word is the useful part: your first reaction is the most honest one.</a:t>
             </a:r>
           </a:p>
         </p:txBody>

--- a/tutor-time/movement-and-mental-health/downloads/Movement_and_Mental_Health_Lesson_2.pptx
+++ b/tutor-time/movement-and-mental-health/downloads/Movement_and_Mental_Health_Lesson_2.pptx
@@ -3209,7 +3209,7 @@
                 <a:solidFill>
                   <a:srgbClr val="502961"/>
                 </a:solidFill>
-                <a:latin typeface="Karla"/>
+                <a:latin typeface="Calibri"/>
               </a:rPr>
               <a:t>MOVEMENT AND MENTAL HEALTH  ·  LESSON 2 OF 3</a:t>
             </a:r>
@@ -3247,11 +3247,11 @@
               </a:spcAft>
             </a:pPr>
             <a:r>
-              <a:rPr sz="3400" b="1" i="0">
+              <a:rPr sz="3400" b="0" i="0">
                 <a:solidFill>
                   <a:srgbClr val="502961"/>
                 </a:solidFill>
-                <a:latin typeface="Libre Caslon Display"/>
+                <a:latin typeface="Georgia"/>
               </a:rPr>
               <a:t>Test it on this room</a:t>
             </a:r>
@@ -3337,7 +3337,7 @@
                 <a:solidFill>
                   <a:srgbClr val="635C6B"/>
                 </a:solidFill>
-                <a:latin typeface="Karla"/>
+                <a:latin typeface="Calibri"/>
               </a:rPr>
               <a:t>You wrote a prediction last week.</a:t>
             </a:r>
@@ -3347,7 +3347,7 @@
                 <a:solidFill>
                   <a:srgbClr val="635C6B"/>
                 </a:solidFill>
-                <a:latin typeface="Karla"/>
+                <a:latin typeface="Calibri"/>
               </a:rPr>
               <a:t>Now thirty of you find out how close it was.</a:t>
             </a:r>
@@ -3389,7 +3389,7 @@
                 <a:solidFill>
                   <a:srgbClr val="9C95A3"/>
                 </a:solidFill>
-                <a:latin typeface="Karla"/>
+                <a:latin typeface="Calibri"/>
               </a:rPr>
               <a:t>Healthy Body, Healthy Mind</a:t>
             </a:r>
@@ -3455,7 +3455,7 @@
                 <a:solidFill>
                   <a:srgbClr val="9C95A3"/>
                 </a:solidFill>
-                <a:latin typeface="Karla"/>
+                <a:latin typeface="Calibri"/>
               </a:rPr>
               <a:t>The Pastoral Guide</a:t>
             </a:r>
@@ -3497,7 +3497,7 @@
                 <a:solidFill>
                   <a:srgbClr val="9C95A3"/>
                 </a:solidFill>
-                <a:latin typeface="Karla"/>
+                <a:latin typeface="Calibri"/>
               </a:rPr>
               <a:t>1 / 19</a:t>
             </a:r>
@@ -3601,97 +3601,9 @@
                 <a:solidFill>
                   <a:srgbClr val="502961"/>
                 </a:solidFill>
-                <a:latin typeface="Karla"/>
+                <a:latin typeface="Calibri"/>
               </a:rPr>
               <a:t>ALL OF IT ON THE BOARD</a:t>
-            </a:r>
-          </a:p>
-        </p:txBody>
-      </p:sp>
-      <p:sp>
-        <p:nvSpPr>
-          <p:cNvPr id="4" name="Rounded Rectangle 3"/>
-          <p:cNvSpPr/>
-          <p:nvPr/>
-        </p:nvSpPr>
-        <p:spPr>
-          <a:xfrm>
-            <a:off x="6922008" y="530352"/>
-            <a:ext cx="1536192" cy="347472"/>
-          </a:xfrm>
-          <a:prstGeom prst="roundRect">
-            <a:avLst>
-              <a:gd name="adj" fmla="val 50000"/>
-            </a:avLst>
-          </a:prstGeom>
-          <a:solidFill>
-            <a:srgbClr val="F0E4F5"/>
-          </a:solidFill>
-          <a:ln>
-            <a:noFill/>
-          </a:ln>
-          <a:effectLst/>
-        </p:spPr>
-        <p:style>
-          <a:lnRef idx="1">
-            <a:schemeClr val="accent1"/>
-          </a:lnRef>
-          <a:fillRef idx="3">
-            <a:schemeClr val="accent1"/>
-          </a:fillRef>
-          <a:effectRef idx="2">
-            <a:schemeClr val="accent1"/>
-          </a:effectRef>
-          <a:fontRef idx="minor">
-            <a:schemeClr val="lt1"/>
-          </a:fontRef>
-        </p:style>
-        <p:txBody>
-          <a:bodyPr rtlCol="0" anchor="ctr"/>
-          <a:lstStyle/>
-          <a:p>
-            <a:pPr algn="ctr"/>
-          </a:p>
-        </p:txBody>
-      </p:sp>
-      <p:sp>
-        <p:nvSpPr>
-          <p:cNvPr id="5" name="TextBox 4"/>
-          <p:cNvSpPr txBox="1"/>
-          <p:nvPr/>
-        </p:nvSpPr>
-        <p:spPr>
-          <a:xfrm>
-            <a:off x="6922008" y="589788"/>
-            <a:ext cx="1536192" cy="237744"/>
-          </a:xfrm>
-          <a:prstGeom prst="rect">
-            <a:avLst/>
-          </a:prstGeom>
-          <a:noFill/>
-        </p:spPr>
-        <p:txBody>
-          <a:bodyPr wrap="square" lIns="0" rIns="0" tIns="0" bIns="0" anchor="t">
-            <a:spAutoFit/>
-          </a:bodyPr>
-          <a:lstStyle/>
-          <a:p>
-            <a:pPr algn="ctr">
-              <a:lnSpc>
-                <a:spcPct val="125000"/>
-              </a:lnSpc>
-              <a:spcAft>
-                <a:spcPts val="0"/>
-              </a:spcAft>
-            </a:pPr>
-            <a:r>
-              <a:rPr sz="1000" b="1" i="0" spc="100">
-                <a:solidFill>
-                  <a:srgbClr val="502961"/>
-                </a:solidFill>
-                <a:latin typeface="Karla"/>
-              </a:rPr>
-              <a:t>CLASS DATA</a:t>
             </a:r>
           </a:p>
         </p:txBody>
@@ -3727,11 +3639,11 @@
               </a:spcAft>
             </a:pPr>
             <a:r>
-              <a:rPr sz="3200" b="1" i="0">
+              <a:rPr sz="3200" b="0" i="0">
                 <a:solidFill>
                   <a:srgbClr val="2F2A36"/>
                 </a:solidFill>
-                <a:latin typeface="Libre Caslon Display"/>
+                <a:latin typeface="Georgia"/>
               </a:rPr>
               <a:t>Thirty results, not one</a:t>
             </a:r>
@@ -3773,7 +3685,7 @@
                 <a:solidFill>
                   <a:srgbClr val="635C6B"/>
                 </a:solidFill>
-                <a:latin typeface="Karla"/>
+                <a:latin typeface="Calibri"/>
               </a:rPr>
               <a:t>Hands up in bands. Your teacher writes the totals, not your name.</a:t>
             </a:r>
@@ -3859,11 +3771,11 @@
               </a:spcAft>
             </a:pPr>
             <a:r>
-              <a:rPr sz="1300" b="1" i="0">
+              <a:rPr sz="1300" b="0" i="0">
                 <a:solidFill>
                   <a:srgbClr val="502961"/>
                 </a:solidFill>
-                <a:latin typeface="Libre Caslon Display"/>
+                <a:latin typeface="Georgia"/>
               </a:rPr>
               <a:t>Pulse went up by</a:t>
             </a:r>
@@ -3905,7 +3817,7 @@
                 <a:solidFill>
                   <a:srgbClr val="635C6B"/>
                 </a:solidFill>
-                <a:latin typeface="Karla"/>
+                <a:latin typeface="Calibri"/>
               </a:rPr>
               <a:t>Under 10  ·  10 to 25  ·  25 to 40  ·  more than 40</a:t>
             </a:r>
@@ -3991,11 +3903,11 @@
               </a:spcAft>
             </a:pPr>
             <a:r>
-              <a:rPr sz="1300" b="1" i="0">
+              <a:rPr sz="1300" b="0" i="0">
                 <a:solidFill>
                   <a:srgbClr val="502961"/>
                 </a:solidFill>
-                <a:latin typeface="Libre Caslon Display"/>
+                <a:latin typeface="Georgia"/>
               </a:rPr>
               <a:t>Focus went up by</a:t>
             </a:r>
@@ -4037,7 +3949,7 @@
                 <a:solidFill>
                   <a:srgbClr val="635C6B"/>
                 </a:solidFill>
-                <a:latin typeface="Karla"/>
+                <a:latin typeface="Calibri"/>
               </a:rPr>
               <a:t>Not at all  ·  1 point  ·  2 to 3  ·  more than 3</a:t>
             </a:r>
@@ -4123,11 +4035,11 @@
               </a:spcAft>
             </a:pPr>
             <a:r>
-              <a:rPr sz="1300" b="1" i="0">
+              <a:rPr sz="1300" b="0" i="0">
                 <a:solidFill>
                   <a:srgbClr val="502961"/>
                 </a:solidFill>
-                <a:latin typeface="Libre Caslon Display"/>
+                <a:latin typeface="Georgia"/>
               </a:rPr>
               <a:t>Focus went down</a:t>
             </a:r>
@@ -4169,7 +4081,7 @@
                 <a:solidFill>
                   <a:srgbClr val="635C6B"/>
                 </a:solidFill>
-                <a:latin typeface="Karla"/>
+                <a:latin typeface="Calibri"/>
               </a:rPr>
               <a:t>It does for some people, and that is a real result too.</a:t>
             </a:r>
@@ -4211,7 +4123,7 @@
                 <a:solidFill>
                   <a:srgbClr val="502961"/>
                 </a:solidFill>
-                <a:latin typeface="Karla"/>
+                <a:latin typeface="Calibri"/>
               </a:rPr>
               <a:t>Ten minutes have to pass before the last measurement. This is how you spend them.</a:t>
             </a:r>
@@ -4277,7 +4189,7 @@
                 <a:solidFill>
                   <a:srgbClr val="9C95A3"/>
                 </a:solidFill>
-                <a:latin typeface="Karla"/>
+                <a:latin typeface="Calibri"/>
               </a:rPr>
               <a:t>The Pastoral Guide</a:t>
             </a:r>
@@ -4319,7 +4231,7 @@
                 <a:solidFill>
                   <a:srgbClr val="9C95A3"/>
                 </a:solidFill>
-                <a:latin typeface="Karla"/>
+                <a:latin typeface="Calibri"/>
               </a:rPr>
               <a:t>10 / 19</a:t>
             </a:r>
@@ -4423,97 +4335,9 @@
                 <a:solidFill>
                   <a:srgbClr val="502961"/>
                 </a:solidFill>
-                <a:latin typeface="Karla"/>
+                <a:latin typeface="Calibri"/>
               </a:rPr>
               <a:t>BACK TO WHAT YOU WROTE</a:t>
-            </a:r>
-          </a:p>
-        </p:txBody>
-      </p:sp>
-      <p:sp>
-        <p:nvSpPr>
-          <p:cNvPr id="4" name="Rounded Rectangle 3"/>
-          <p:cNvSpPr/>
-          <p:nvPr/>
-        </p:nvSpPr>
-        <p:spPr>
-          <a:xfrm>
-            <a:off x="7086600" y="530352"/>
-            <a:ext cx="1371600" cy="347472"/>
-          </a:xfrm>
-          <a:prstGeom prst="roundRect">
-            <a:avLst>
-              <a:gd name="adj" fmla="val 50000"/>
-            </a:avLst>
-          </a:prstGeom>
-          <a:solidFill>
-            <a:srgbClr val="F0E4F5"/>
-          </a:solidFill>
-          <a:ln>
-            <a:noFill/>
-          </a:ln>
-          <a:effectLst/>
-        </p:spPr>
-        <p:style>
-          <a:lnRef idx="1">
-            <a:schemeClr val="accent1"/>
-          </a:lnRef>
-          <a:fillRef idx="3">
-            <a:schemeClr val="accent1"/>
-          </a:fillRef>
-          <a:effectRef idx="2">
-            <a:schemeClr val="accent1"/>
-          </a:effectRef>
-          <a:fontRef idx="minor">
-            <a:schemeClr val="lt1"/>
-          </a:fontRef>
-        </p:style>
-        <p:txBody>
-          <a:bodyPr rtlCol="0" anchor="ctr"/>
-          <a:lstStyle/>
-          <a:p>
-            <a:pPr algn="ctr"/>
-          </a:p>
-        </p:txBody>
-      </p:sp>
-      <p:sp>
-        <p:nvSpPr>
-          <p:cNvPr id="5" name="TextBox 4"/>
-          <p:cNvSpPr txBox="1"/>
-          <p:nvPr/>
-        </p:nvSpPr>
-        <p:spPr>
-          <a:xfrm>
-            <a:off x="7086600" y="589788"/>
-            <a:ext cx="1371600" cy="237744"/>
-          </a:xfrm>
-          <a:prstGeom prst="rect">
-            <a:avLst/>
-          </a:prstGeom>
-          <a:noFill/>
-        </p:spPr>
-        <p:txBody>
-          <a:bodyPr wrap="square" lIns="0" rIns="0" tIns="0" bIns="0" anchor="t">
-            <a:spAutoFit/>
-          </a:bodyPr>
-          <a:lstStyle/>
-          <a:p>
-            <a:pPr algn="ctr">
-              <a:lnSpc>
-                <a:spcPct val="125000"/>
-              </a:lnSpc>
-              <a:spcAft>
-                <a:spcPts val="0"/>
-              </a:spcAft>
-            </a:pPr>
-            <a:r>
-              <a:rPr sz="1000" b="1" i="0" spc="100">
-                <a:solidFill>
-                  <a:srgbClr val="502961"/>
-                </a:solidFill>
-                <a:latin typeface="Karla"/>
-              </a:rPr>
-              <a:t>COMPARE</a:t>
             </a:r>
           </a:p>
         </p:txBody>
@@ -4549,11 +4373,11 @@
               </a:spcAft>
             </a:pPr>
             <a:r>
-              <a:rPr sz="3200" b="1" i="0">
+              <a:rPr sz="3200" b="0" i="0">
                 <a:solidFill>
                   <a:srgbClr val="2F2A36"/>
                 </a:solidFill>
-                <a:latin typeface="Libre Caslon Display"/>
+                <a:latin typeface="Georgia"/>
               </a:rPr>
               <a:t>How close were you?</a:t>
             </a:r>
@@ -4683,11 +4507,11 @@
               </a:spcAft>
             </a:pPr>
             <a:r>
-              <a:rPr sz="1200" b="1" i="0">
+              <a:rPr sz="1200" b="0" i="0">
                 <a:solidFill>
                   <a:srgbClr val="FFFDF7"/>
                 </a:solidFill>
-                <a:latin typeface="Libre Caslon Display"/>
+                <a:latin typeface="Georgia"/>
               </a:rPr>
               <a:t>1</a:t>
             </a:r>
@@ -4729,7 +4553,7 @@
                 <a:solidFill>
                   <a:srgbClr val="2F2A36"/>
                 </a:solidFill>
-                <a:latin typeface="Karla"/>
+                <a:latin typeface="Calibri"/>
               </a:rPr>
               <a:t>Who predicted their pulse within ten? Hands up.</a:t>
             </a:r>
@@ -4859,11 +4683,11 @@
               </a:spcAft>
             </a:pPr>
             <a:r>
-              <a:rPr sz="1200" b="1" i="0">
+              <a:rPr sz="1200" b="0" i="0">
                 <a:solidFill>
                   <a:srgbClr val="FFFDF7"/>
                 </a:solidFill>
-                <a:latin typeface="Libre Caslon Display"/>
+                <a:latin typeface="Georgia"/>
               </a:rPr>
               <a:t>2</a:t>
             </a:r>
@@ -4905,7 +4729,7 @@
                 <a:solidFill>
                   <a:srgbClr val="2F2A36"/>
                 </a:solidFill>
-                <a:latin typeface="Karla"/>
+                <a:latin typeface="Calibri"/>
               </a:rPr>
               <a:t>Who predicted the focus change, up or down, correctly?</a:t>
             </a:r>
@@ -5035,11 +4859,11 @@
               </a:spcAft>
             </a:pPr>
             <a:r>
-              <a:rPr sz="1200" b="1" i="0">
+              <a:rPr sz="1200" b="0" i="0">
                 <a:solidFill>
                   <a:srgbClr val="FFFDF7"/>
                 </a:solidFill>
-                <a:latin typeface="Libre Caslon Display"/>
+                <a:latin typeface="Georgia"/>
               </a:rPr>
               <a:t>3</a:t>
             </a:r>
@@ -5081,7 +4905,7 @@
                 <a:solidFill>
                   <a:srgbClr val="2F2A36"/>
                 </a:solidFill>
-                <a:latin typeface="Karla"/>
+                <a:latin typeface="Calibri"/>
               </a:rPr>
               <a:t>Did more people get the pulse right, or the focus? Which was easier to guess?</a:t>
             </a:r>
@@ -5123,7 +4947,7 @@
                 <a:solidFill>
                   <a:srgbClr val="502961"/>
                 </a:solidFill>
-                <a:latin typeface="Karla"/>
+                <a:latin typeface="Calibri"/>
               </a:rPr>
               <a:t>The pulse is the obvious change. The focus one is the change worth having.</a:t>
             </a:r>
@@ -5189,7 +5013,7 @@
                 <a:solidFill>
                   <a:srgbClr val="9C95A3"/>
                 </a:solidFill>
-                <a:latin typeface="Karla"/>
+                <a:latin typeface="Calibri"/>
               </a:rPr>
               <a:t>The Pastoral Guide</a:t>
             </a:r>
@@ -5231,7 +5055,7 @@
                 <a:solidFill>
                   <a:srgbClr val="9C95A3"/>
                 </a:solidFill>
-                <a:latin typeface="Karla"/>
+                <a:latin typeface="Calibri"/>
               </a:rPr>
               <a:t>11 / 19</a:t>
             </a:r>
@@ -5335,97 +5159,9 @@
                 <a:solidFill>
                   <a:srgbClr val="502961"/>
                 </a:solidFill>
-                <a:latin typeface="Karla"/>
+                <a:latin typeface="Calibri"/>
               </a:rPr>
               <a:t>AGAINST A REAL STUDY</a:t>
-            </a:r>
-          </a:p>
-        </p:txBody>
-      </p:sp>
-      <p:sp>
-        <p:nvSpPr>
-          <p:cNvPr id="4" name="Rounded Rectangle 3"/>
-          <p:cNvSpPr/>
-          <p:nvPr/>
-        </p:nvSpPr>
-        <p:spPr>
-          <a:xfrm>
-            <a:off x="7086600" y="530352"/>
-            <a:ext cx="1371600" cy="347472"/>
-          </a:xfrm>
-          <a:prstGeom prst="roundRect">
-            <a:avLst>
-              <a:gd name="adj" fmla="val 50000"/>
-            </a:avLst>
-          </a:prstGeom>
-          <a:solidFill>
-            <a:srgbClr val="F0E4F5"/>
-          </a:solidFill>
-          <a:ln>
-            <a:noFill/>
-          </a:ln>
-          <a:effectLst/>
-        </p:spPr>
-        <p:style>
-          <a:lnRef idx="1">
-            <a:schemeClr val="accent1"/>
-          </a:lnRef>
-          <a:fillRef idx="3">
-            <a:schemeClr val="accent1"/>
-          </a:fillRef>
-          <a:effectRef idx="2">
-            <a:schemeClr val="accent1"/>
-          </a:effectRef>
-          <a:fontRef idx="minor">
-            <a:schemeClr val="lt1"/>
-          </a:fontRef>
-        </p:style>
-        <p:txBody>
-          <a:bodyPr rtlCol="0" anchor="ctr"/>
-          <a:lstStyle/>
-          <a:p>
-            <a:pPr algn="ctr"/>
-          </a:p>
-        </p:txBody>
-      </p:sp>
-      <p:sp>
-        <p:nvSpPr>
-          <p:cNvPr id="5" name="TextBox 4"/>
-          <p:cNvSpPr txBox="1"/>
-          <p:nvPr/>
-        </p:nvSpPr>
-        <p:spPr>
-          <a:xfrm>
-            <a:off x="7086600" y="589788"/>
-            <a:ext cx="1371600" cy="237744"/>
-          </a:xfrm>
-          <a:prstGeom prst="rect">
-            <a:avLst/>
-          </a:prstGeom>
-          <a:noFill/>
-        </p:spPr>
-        <p:txBody>
-          <a:bodyPr wrap="square" lIns="0" rIns="0" tIns="0" bIns="0" anchor="t">
-            <a:spAutoFit/>
-          </a:bodyPr>
-          <a:lstStyle/>
-          <a:p>
-            <a:pPr algn="ctr">
-              <a:lnSpc>
-                <a:spcPct val="125000"/>
-              </a:lnSpc>
-              <a:spcAft>
-                <a:spcPts val="0"/>
-              </a:spcAft>
-            </a:pPr>
-            <a:r>
-              <a:rPr sz="1000" b="1" i="0" spc="100">
-                <a:solidFill>
-                  <a:srgbClr val="502961"/>
-                </a:solidFill>
-                <a:latin typeface="Karla"/>
-              </a:rPr>
-              <a:t>SCIENCE</a:t>
             </a:r>
           </a:p>
         </p:txBody>
@@ -5461,11 +5197,11 @@
               </a:spcAft>
             </a:pPr>
             <a:r>
-              <a:rPr sz="2900" b="1" i="0">
+              <a:rPr sz="2900" b="0" i="0">
                 <a:solidFill>
                   <a:srgbClr val="2F2A36"/>
                 </a:solidFill>
-                <a:latin typeface="Libre Caslon Display"/>
+                <a:latin typeface="Georgia"/>
               </a:rPr>
               <a:t>Thirty of you, 168 of them</a:t>
             </a:r>
@@ -5555,7 +5291,7 @@
                 <a:solidFill>
                   <a:srgbClr val="502961"/>
                 </a:solidFill>
-                <a:latin typeface="Karla"/>
+                <a:latin typeface="Calibri"/>
               </a:rPr>
               <a:t>The study from last week: half moved for twenty minutes at break, half did not.</a:t>
             </a:r>
@@ -5641,11 +5377,11 @@
               </a:spcAft>
             </a:pPr>
             <a:r>
-              <a:rPr sz="1200" b="1" i="0">
+              <a:rPr sz="1200" b="0" i="0">
                 <a:solidFill>
                   <a:srgbClr val="502961"/>
                 </a:solidFill>
-                <a:latin typeface="Libre Caslon Display"/>
+                <a:latin typeface="Georgia"/>
               </a:rPr>
               <a:t>What they found</a:t>
             </a:r>
@@ -5687,7 +5423,7 @@
                 <a:solidFill>
                   <a:srgbClr val="635C6B"/>
                 </a:solidFill>
-                <a:latin typeface="Karla"/>
+                <a:latin typeface="Calibri"/>
               </a:rPr>
               <a:t>The movers’ attention went up. The others’ went slightly down.</a:t>
             </a:r>
@@ -5773,11 +5509,11 @@
               </a:spcAft>
             </a:pPr>
             <a:r>
-              <a:rPr sz="1200" b="1" i="0">
+              <a:rPr sz="1200" b="0" i="0">
                 <a:solidFill>
                   <a:srgbClr val="502961"/>
                 </a:solidFill>
-                <a:latin typeface="Libre Caslon Display"/>
+                <a:latin typeface="Georgia"/>
               </a:rPr>
               <a:t>What you found</a:t>
             </a:r>
@@ -5819,7 +5555,7 @@
                 <a:solidFill>
                   <a:srgbClr val="635C6B"/>
                 </a:solidFill>
-                <a:latin typeface="Karla"/>
+                <a:latin typeface="Calibri"/>
               </a:rPr>
               <a:t>Whatever is on the board. Compare the direction first, then the size.</a:t>
             </a:r>
@@ -5905,11 +5641,11 @@
               </a:spcAft>
             </a:pPr>
             <a:r>
-              <a:rPr sz="1200" b="1" i="0">
+              <a:rPr sz="1200" b="0" i="0">
                 <a:solidFill>
                   <a:srgbClr val="502961"/>
                 </a:solidFill>
-                <a:latin typeface="Libre Caslon Display"/>
+                <a:latin typeface="Georgia"/>
               </a:rPr>
               <a:t>Three ways yours is weaker</a:t>
             </a:r>
@@ -5951,7 +5687,7 @@
                 <a:solidFill>
                   <a:srgbClr val="635C6B"/>
                 </a:solidFill>
-                <a:latin typeface="Karla"/>
+                <a:latin typeface="Calibri"/>
               </a:rPr>
               <a:t>No control group, thirty people not 168, and you scored yourselves.</a:t>
             </a:r>
@@ -5993,7 +5729,7 @@
                 <a:solidFill>
                   <a:srgbClr val="502961"/>
                 </a:solidFill>
-                <a:latin typeface="Karla"/>
+                <a:latin typeface="Calibri"/>
               </a:rPr>
               <a:t>Getting the same direction as a proper study, with worse tools, is a real result.</a:t>
             </a:r>
@@ -6035,7 +5771,7 @@
                 <a:solidFill>
                   <a:srgbClr val="9C95A3"/>
                 </a:solidFill>
-                <a:latin typeface="Karla"/>
+                <a:latin typeface="Calibri"/>
               </a:rPr>
               <a:t>Xiao, X. (2026). Frontiers in Psychology, 17, 1781997.</a:t>
             </a:r>
@@ -6101,7 +5837,7 @@
                 <a:solidFill>
                   <a:srgbClr val="9C95A3"/>
                 </a:solidFill>
-                <a:latin typeface="Karla"/>
+                <a:latin typeface="Calibri"/>
               </a:rPr>
               <a:t>The Pastoral Guide</a:t>
             </a:r>
@@ -6143,7 +5879,7 @@
                 <a:solidFill>
                   <a:srgbClr val="9C95A3"/>
                 </a:solidFill>
-                <a:latin typeface="Karla"/>
+                <a:latin typeface="Calibri"/>
               </a:rPr>
               <a:t>12 / 19</a:t>
             </a:r>
@@ -6247,97 +5983,9 @@
                 <a:solidFill>
                   <a:srgbClr val="D8BCE4"/>
                 </a:solidFill>
-                <a:latin typeface="Karla"/>
+                <a:latin typeface="Calibri"/>
               </a:rPr>
               <a:t>COLUMN C</a:t>
-            </a:r>
-          </a:p>
-        </p:txBody>
-      </p:sp>
-      <p:sp>
-        <p:nvSpPr>
-          <p:cNvPr id="4" name="Rounded Rectangle 3"/>
-          <p:cNvSpPr/>
-          <p:nvPr/>
-        </p:nvSpPr>
-        <p:spPr>
-          <a:xfrm>
-            <a:off x="7086600" y="530352"/>
-            <a:ext cx="1371600" cy="347472"/>
-          </a:xfrm>
-          <a:prstGeom prst="roundRect">
-            <a:avLst>
-              <a:gd name="adj" fmla="val 50000"/>
-            </a:avLst>
-          </a:prstGeom>
-          <a:solidFill>
-            <a:srgbClr val="FFFDF7"/>
-          </a:solidFill>
-          <a:ln>
-            <a:noFill/>
-          </a:ln>
-          <a:effectLst/>
-        </p:spPr>
-        <p:style>
-          <a:lnRef idx="1">
-            <a:schemeClr val="accent1"/>
-          </a:lnRef>
-          <a:fillRef idx="3">
-            <a:schemeClr val="accent1"/>
-          </a:fillRef>
-          <a:effectRef idx="2">
-            <a:schemeClr val="accent1"/>
-          </a:effectRef>
-          <a:fontRef idx="minor">
-            <a:schemeClr val="lt1"/>
-          </a:fontRef>
-        </p:style>
-        <p:txBody>
-          <a:bodyPr rtlCol="0" anchor="ctr"/>
-          <a:lstStyle/>
-          <a:p>
-            <a:pPr algn="ctr"/>
-          </a:p>
-        </p:txBody>
-      </p:sp>
-      <p:sp>
-        <p:nvSpPr>
-          <p:cNvPr id="5" name="TextBox 4"/>
-          <p:cNvSpPr txBox="1"/>
-          <p:nvPr/>
-        </p:nvSpPr>
-        <p:spPr>
-          <a:xfrm>
-            <a:off x="7086600" y="589788"/>
-            <a:ext cx="1371600" cy="237744"/>
-          </a:xfrm>
-          <a:prstGeom prst="rect">
-            <a:avLst/>
-          </a:prstGeom>
-          <a:noFill/>
-        </p:spPr>
-        <p:txBody>
-          <a:bodyPr wrap="square" lIns="0" rIns="0" tIns="0" bIns="0" anchor="t">
-            <a:spAutoFit/>
-          </a:bodyPr>
-          <a:lstStyle/>
-          <a:p>
-            <a:pPr algn="ctr">
-              <a:lnSpc>
-                <a:spcPct val="125000"/>
-              </a:lnSpc>
-              <a:spcAft>
-                <a:spcPts val="0"/>
-              </a:spcAft>
-            </a:pPr>
-            <a:r>
-              <a:rPr sz="1000" b="1" i="0" spc="100">
-                <a:solidFill>
-                  <a:srgbClr val="502961"/>
-                </a:solidFill>
-                <a:latin typeface="Karla"/>
-              </a:rPr>
-              <a:t>MEASURE</a:t>
             </a:r>
           </a:p>
         </p:txBody>
@@ -6373,11 +6021,11 @@
               </a:spcAft>
             </a:pPr>
             <a:r>
-              <a:rPr sz="3600" b="1" i="0">
+              <a:rPr sz="3600" b="0" i="0">
                 <a:solidFill>
                   <a:srgbClr val="FFFDF7"/>
                 </a:solidFill>
-                <a:latin typeface="Libre Caslon Display"/>
+                <a:latin typeface="Georgia"/>
               </a:rPr>
               <a:t>Ten minutes later</a:t>
             </a:r>
@@ -6467,7 +6115,7 @@
                 <a:solidFill>
                   <a:srgbClr val="502961"/>
                 </a:solidFill>
-                <a:latin typeface="Karla"/>
+                <a:latin typeface="Calibri"/>
               </a:rPr>
               <a:t>Pulse again. It should be close to where it started.</a:t>
             </a:r>
@@ -6557,7 +6205,7 @@
                 <a:solidFill>
                   <a:srgbClr val="502961"/>
                 </a:solidFill>
-                <a:latin typeface="Karla"/>
+                <a:latin typeface="Calibri"/>
               </a:rPr>
               <a:t>Focus again. This is the one that does not go back.</a:t>
             </a:r>
@@ -6647,7 +6295,7 @@
                 <a:solidFill>
                   <a:srgbClr val="502961"/>
                 </a:solidFill>
-                <a:latin typeface="Karla"/>
+                <a:latin typeface="Calibri"/>
               </a:rPr>
               <a:t>Circle whichever of your three numbers surprised you most.</a:t>
             </a:r>
@@ -6689,7 +6337,7 @@
                 <a:solidFill>
                   <a:srgbClr val="FFFDF7"/>
                 </a:solidFill>
-                <a:latin typeface="Karla"/>
+                <a:latin typeface="Calibri"/>
               </a:rPr>
               <a:t>Your heart went back. Your head did not, or not all the way.</a:t>
             </a:r>
@@ -6755,7 +6403,7 @@
                 <a:solidFill>
                   <a:srgbClr val="D8BCE4"/>
                 </a:solidFill>
-                <a:latin typeface="Karla"/>
+                <a:latin typeface="Calibri"/>
               </a:rPr>
               <a:t>The Pastoral Guide</a:t>
             </a:r>
@@ -6797,7 +6445,7 @@
                 <a:solidFill>
                   <a:srgbClr val="D8BCE4"/>
                 </a:solidFill>
-                <a:latin typeface="Karla"/>
+                <a:latin typeface="Calibri"/>
               </a:rPr>
               <a:t>13 / 19</a:t>
             </a:r>
@@ -6901,97 +6549,9 @@
                 <a:solidFill>
                   <a:srgbClr val="502961"/>
                 </a:solidFill>
-                <a:latin typeface="Karla"/>
+                <a:latin typeface="Calibri"/>
               </a:rPr>
               <a:t>BACK TO THE GRAPH FROM LESSON ONE</a:t>
-            </a:r>
-          </a:p>
-        </p:txBody>
-      </p:sp>
-      <p:sp>
-        <p:nvSpPr>
-          <p:cNvPr id="4" name="Rounded Rectangle 3"/>
-          <p:cNvSpPr/>
-          <p:nvPr/>
-        </p:nvSpPr>
-        <p:spPr>
-          <a:xfrm>
-            <a:off x="7086600" y="530352"/>
-            <a:ext cx="1371600" cy="347472"/>
-          </a:xfrm>
-          <a:prstGeom prst="roundRect">
-            <a:avLst>
-              <a:gd name="adj" fmla="val 50000"/>
-            </a:avLst>
-          </a:prstGeom>
-          <a:solidFill>
-            <a:srgbClr val="F0E4F5"/>
-          </a:solidFill>
-          <a:ln>
-            <a:noFill/>
-          </a:ln>
-          <a:effectLst/>
-        </p:spPr>
-        <p:style>
-          <a:lnRef idx="1">
-            <a:schemeClr val="accent1"/>
-          </a:lnRef>
-          <a:fillRef idx="3">
-            <a:schemeClr val="accent1"/>
-          </a:fillRef>
-          <a:effectRef idx="2">
-            <a:schemeClr val="accent1"/>
-          </a:effectRef>
-          <a:fontRef idx="minor">
-            <a:schemeClr val="lt1"/>
-          </a:fontRef>
-        </p:style>
-        <p:txBody>
-          <a:bodyPr rtlCol="0" anchor="ctr"/>
-          <a:lstStyle/>
-          <a:p>
-            <a:pPr algn="ctr"/>
-          </a:p>
-        </p:txBody>
-      </p:sp>
-      <p:sp>
-        <p:nvSpPr>
-          <p:cNvPr id="5" name="TextBox 4"/>
-          <p:cNvSpPr txBox="1"/>
-          <p:nvPr/>
-        </p:nvSpPr>
-        <p:spPr>
-          <a:xfrm>
-            <a:off x="7086600" y="589788"/>
-            <a:ext cx="1371600" cy="237744"/>
-          </a:xfrm>
-          <a:prstGeom prst="rect">
-            <a:avLst/>
-          </a:prstGeom>
-          <a:noFill/>
-        </p:spPr>
-        <p:txBody>
-          <a:bodyPr wrap="square" lIns="0" rIns="0" tIns="0" bIns="0" anchor="t">
-            <a:spAutoFit/>
-          </a:bodyPr>
-          <a:lstStyle/>
-          <a:p>
-            <a:pPr algn="ctr">
-              <a:lnSpc>
-                <a:spcPct val="125000"/>
-              </a:lnSpc>
-              <a:spcAft>
-                <a:spcPts val="0"/>
-              </a:spcAft>
-            </a:pPr>
-            <a:r>
-              <a:rPr sz="1000" b="1" i="0" spc="100">
-                <a:solidFill>
-                  <a:srgbClr val="502961"/>
-                </a:solidFill>
-                <a:latin typeface="Karla"/>
-              </a:rPr>
-              <a:t>SCIENCE</a:t>
             </a:r>
           </a:p>
         </p:txBody>
@@ -7027,11 +6587,11 @@
               </a:spcAft>
             </a:pPr>
             <a:r>
-              <a:rPr sz="3200" b="1" i="0">
+              <a:rPr sz="3200" b="0" i="0">
                 <a:solidFill>
                   <a:srgbClr val="2F2A36"/>
                 </a:solidFill>
-                <a:latin typeface="Libre Caslon Display"/>
+                <a:latin typeface="Georgia"/>
               </a:rPr>
               <a:t>You just drew this</a:t>
             </a:r>
@@ -7161,7 +6721,7 @@
                 <a:solidFill>
                   <a:srgbClr val="635C6B"/>
                 </a:solidFill>
-                <a:latin typeface="Karla"/>
+                <a:latin typeface="Calibri"/>
               </a:rPr>
               <a:t>HOW YOU FEEL</a:t>
             </a:r>
@@ -7203,7 +6763,7 @@
                 <a:solidFill>
                   <a:srgbClr val="635C6B"/>
                 </a:solidFill>
-                <a:latin typeface="Karla"/>
+                <a:latin typeface="Calibri"/>
               </a:rPr>
               <a:t>TIME</a:t>
             </a:r>
@@ -8240,7 +7800,7 @@
                 <a:solidFill>
                   <a:srgbClr val="502961"/>
                 </a:solidFill>
-                <a:latin typeface="Karla"/>
+                <a:latin typeface="Calibri"/>
               </a:rPr>
               <a:t>A</a:t>
             </a:r>
@@ -8326,7 +7886,7 @@
                 <a:solidFill>
                   <a:srgbClr val="502961"/>
                 </a:solidFill>
-                <a:latin typeface="Karla"/>
+                <a:latin typeface="Calibri"/>
               </a:rPr>
               <a:t>B</a:t>
             </a:r>
@@ -8412,7 +7972,7 @@
                 <a:solidFill>
                   <a:srgbClr val="502961"/>
                 </a:solidFill>
-                <a:latin typeface="Karla"/>
+                <a:latin typeface="Calibri"/>
               </a:rPr>
               <a:t>C</a:t>
             </a:r>
@@ -8454,7 +8014,7 @@
                 <a:solidFill>
                   <a:srgbClr val="9C95A3"/>
                 </a:solidFill>
-                <a:latin typeface="Karla"/>
+                <a:latin typeface="Calibri"/>
               </a:rPr>
               <a:t>If you had not moved</a:t>
             </a:r>
@@ -8496,7 +8056,7 @@
                 <a:solidFill>
                   <a:srgbClr val="502961"/>
                 </a:solidFill>
-                <a:latin typeface="Karla"/>
+                <a:latin typeface="Calibri"/>
               </a:rPr>
               <a:t>Three of your own numbers, on a line you were shown a week before you measured it.</a:t>
             </a:r>
@@ -8562,7 +8122,7 @@
                 <a:solidFill>
                   <a:srgbClr val="9C95A3"/>
                 </a:solidFill>
-                <a:latin typeface="Karla"/>
+                <a:latin typeface="Calibri"/>
               </a:rPr>
               <a:t>The Pastoral Guide</a:t>
             </a:r>
@@ -8604,7 +8164,7 @@
                 <a:solidFill>
                   <a:srgbClr val="9C95A3"/>
                 </a:solidFill>
-                <a:latin typeface="Karla"/>
+                <a:latin typeface="Calibri"/>
               </a:rPr>
               <a:t>14 / 19</a:t>
             </a:r>
@@ -8708,97 +8268,9 @@
                 <a:solidFill>
                   <a:srgbClr val="D8BCE4"/>
                 </a:solidFill>
-                <a:latin typeface="Karla"/>
+                <a:latin typeface="Calibri"/>
               </a:rPr>
               <a:t>TO BE CLEAR, AGAIN</a:t>
-            </a:r>
-          </a:p>
-        </p:txBody>
-      </p:sp>
-      <p:sp>
-        <p:nvSpPr>
-          <p:cNvPr id="4" name="Rounded Rectangle 3"/>
-          <p:cNvSpPr/>
-          <p:nvPr/>
-        </p:nvSpPr>
-        <p:spPr>
-          <a:xfrm>
-            <a:off x="7086600" y="530352"/>
-            <a:ext cx="1371600" cy="347472"/>
-          </a:xfrm>
-          <a:prstGeom prst="roundRect">
-            <a:avLst>
-              <a:gd name="adj" fmla="val 50000"/>
-            </a:avLst>
-          </a:prstGeom>
-          <a:solidFill>
-            <a:srgbClr val="FFFDF7"/>
-          </a:solidFill>
-          <a:ln>
-            <a:noFill/>
-          </a:ln>
-          <a:effectLst/>
-        </p:spPr>
-        <p:style>
-          <a:lnRef idx="1">
-            <a:schemeClr val="accent1"/>
-          </a:lnRef>
-          <a:fillRef idx="3">
-            <a:schemeClr val="accent1"/>
-          </a:fillRef>
-          <a:effectRef idx="2">
-            <a:schemeClr val="accent1"/>
-          </a:effectRef>
-          <a:fontRef idx="minor">
-            <a:schemeClr val="lt1"/>
-          </a:fontRef>
-        </p:style>
-        <p:txBody>
-          <a:bodyPr rtlCol="0" anchor="ctr"/>
-          <a:lstStyle/>
-          <a:p>
-            <a:pPr algn="ctr"/>
-          </a:p>
-        </p:txBody>
-      </p:sp>
-      <p:sp>
-        <p:nvSpPr>
-          <p:cNvPr id="5" name="TextBox 4"/>
-          <p:cNvSpPr txBox="1"/>
-          <p:nvPr/>
-        </p:nvSpPr>
-        <p:spPr>
-          <a:xfrm>
-            <a:off x="7086600" y="589788"/>
-            <a:ext cx="1371600" cy="237744"/>
-          </a:xfrm>
-          <a:prstGeom prst="rect">
-            <a:avLst/>
-          </a:prstGeom>
-          <a:noFill/>
-        </p:spPr>
-        <p:txBody>
-          <a:bodyPr wrap="square" lIns="0" rIns="0" tIns="0" bIns="0" anchor="t">
-            <a:spAutoFit/>
-          </a:bodyPr>
-          <a:lstStyle/>
-          <a:p>
-            <a:pPr algn="ctr">
-              <a:lnSpc>
-                <a:spcPct val="125000"/>
-              </a:lnSpc>
-              <a:spcAft>
-                <a:spcPts val="0"/>
-              </a:spcAft>
-            </a:pPr>
-            <a:r>
-              <a:rPr sz="1000" b="1" i="0" spc="100">
-                <a:solidFill>
-                  <a:srgbClr val="502961"/>
-                </a:solidFill>
-                <a:latin typeface="Karla"/>
-              </a:rPr>
-              <a:t>STRAIGHT</a:t>
             </a:r>
           </a:p>
         </p:txBody>
@@ -8834,11 +8306,11 @@
               </a:spcAft>
             </a:pPr>
             <a:r>
-              <a:rPr sz="3000" b="1" i="0">
+              <a:rPr sz="3000" b="0" i="0">
                 <a:solidFill>
                   <a:srgbClr val="FFFDF7"/>
                 </a:solidFill>
-                <a:latin typeface="Libre Caslon Display"/>
+                <a:latin typeface="Georgia"/>
               </a:rPr>
               <a:t>What the numbers do not say</a:t>
             </a:r>
@@ -8928,7 +8400,7 @@
                 <a:solidFill>
                   <a:srgbClr val="502961"/>
                 </a:solidFill>
-                <a:latin typeface="Karla"/>
+                <a:latin typeface="Calibri"/>
               </a:rPr>
               <a:t>A big pulse change is not a good score, and a small one is not a bad one.</a:t>
             </a:r>
@@ -9018,7 +8490,7 @@
                 <a:solidFill>
                   <a:srgbClr val="502961"/>
                 </a:solidFill>
-                <a:latin typeface="Karla"/>
+                <a:latin typeface="Calibri"/>
               </a:rPr>
               <a:t>Nobody in this room has been ranked, and nothing here goes in a report.</a:t>
             </a:r>
@@ -9108,7 +8580,7 @@
                 <a:solidFill>
                   <a:srgbClr val="502961"/>
                 </a:solidFill>
-                <a:latin typeface="Karla"/>
+                <a:latin typeface="Calibri"/>
               </a:rPr>
               <a:t>If your focus went down, that is data. It is not you doing it wrong.</a:t>
             </a:r>
@@ -9150,7 +8622,7 @@
                 <a:solidFill>
                   <a:srgbClr val="FFFDF7"/>
                 </a:solidFill>
-                <a:latin typeface="Karla"/>
+                <a:latin typeface="Calibri"/>
               </a:rPr>
               <a:t>This is one class, on one day, with one measurement each. That is all.</a:t>
             </a:r>
@@ -9216,7 +8688,7 @@
                 <a:solidFill>
                   <a:srgbClr val="D8BCE4"/>
                 </a:solidFill>
-                <a:latin typeface="Karla"/>
+                <a:latin typeface="Calibri"/>
               </a:rPr>
               <a:t>The Pastoral Guide</a:t>
             </a:r>
@@ -9258,7 +8730,7 @@
                 <a:solidFill>
                   <a:srgbClr val="D8BCE4"/>
                 </a:solidFill>
-                <a:latin typeface="Karla"/>
+                <a:latin typeface="Calibri"/>
               </a:rPr>
               <a:t>15 / 19</a:t>
             </a:r>
@@ -9362,97 +8834,9 @@
                 <a:solidFill>
                   <a:srgbClr val="502961"/>
                 </a:solidFill>
-                <a:latin typeface="Karla"/>
+                <a:latin typeface="Calibri"/>
               </a:rPr>
               <a:t>THE ONLY QUESTION THAT MATTERS</a:t>
-            </a:r>
-          </a:p>
-        </p:txBody>
-      </p:sp>
-      <p:sp>
-        <p:nvSpPr>
-          <p:cNvPr id="4" name="Rounded Rectangle 3"/>
-          <p:cNvSpPr/>
-          <p:nvPr/>
-        </p:nvSpPr>
-        <p:spPr>
-          <a:xfrm>
-            <a:off x="7086600" y="530352"/>
-            <a:ext cx="1371600" cy="347472"/>
-          </a:xfrm>
-          <a:prstGeom prst="roundRect">
-            <a:avLst>
-              <a:gd name="adj" fmla="val 50000"/>
-            </a:avLst>
-          </a:prstGeom>
-          <a:solidFill>
-            <a:srgbClr val="F0E4F5"/>
-          </a:solidFill>
-          <a:ln>
-            <a:noFill/>
-          </a:ln>
-          <a:effectLst/>
-        </p:spPr>
-        <p:style>
-          <a:lnRef idx="1">
-            <a:schemeClr val="accent1"/>
-          </a:lnRef>
-          <a:fillRef idx="3">
-            <a:schemeClr val="accent1"/>
-          </a:fillRef>
-          <a:effectRef idx="2">
-            <a:schemeClr val="accent1"/>
-          </a:effectRef>
-          <a:fontRef idx="minor">
-            <a:schemeClr val="lt1"/>
-          </a:fontRef>
-        </p:style>
-        <p:txBody>
-          <a:bodyPr rtlCol="0" anchor="ctr"/>
-          <a:lstStyle/>
-          <a:p>
-            <a:pPr algn="ctr"/>
-          </a:p>
-        </p:txBody>
-      </p:sp>
-      <p:sp>
-        <p:nvSpPr>
-          <p:cNvPr id="5" name="TextBox 4"/>
-          <p:cNvSpPr txBox="1"/>
-          <p:nvPr/>
-        </p:nvSpPr>
-        <p:spPr>
-          <a:xfrm>
-            <a:off x="7086600" y="589788"/>
-            <a:ext cx="1371600" cy="237744"/>
-          </a:xfrm>
-          <a:prstGeom prst="rect">
-            <a:avLst/>
-          </a:prstGeom>
-          <a:noFill/>
-        </p:spPr>
-        <p:txBody>
-          <a:bodyPr wrap="square" lIns="0" rIns="0" tIns="0" bIns="0" anchor="t">
-            <a:spAutoFit/>
-          </a:bodyPr>
-          <a:lstStyle/>
-          <a:p>
-            <a:pPr algn="ctr">
-              <a:lnSpc>
-                <a:spcPct val="125000"/>
-              </a:lnSpc>
-              <a:spcAft>
-                <a:spcPts val="0"/>
-              </a:spcAft>
-            </a:pPr>
-            <a:r>
-              <a:rPr sz="1000" b="1" i="0" spc="100">
-                <a:solidFill>
-                  <a:srgbClr val="502961"/>
-                </a:solidFill>
-                <a:latin typeface="Karla"/>
-              </a:rPr>
-              <a:t>DISCUSS</a:t>
             </a:r>
           </a:p>
         </p:txBody>
@@ -9488,11 +8872,11 @@
               </a:spcAft>
             </a:pPr>
             <a:r>
-              <a:rPr sz="2800" b="1" i="0">
+              <a:rPr sz="2800" b="0" i="0">
                 <a:solidFill>
                   <a:srgbClr val="2F2A36"/>
                 </a:solidFill>
-                <a:latin typeface="Libre Caslon Display"/>
+                <a:latin typeface="Georgia"/>
               </a:rPr>
               <a:t>Would you do it on your own?</a:t>
             </a:r>
@@ -9534,7 +8918,7 @@
                 <a:solidFill>
                   <a:srgbClr val="635C6B"/>
                 </a:solidFill>
-                <a:latin typeface="Karla"/>
+                <a:latin typeface="Calibri"/>
               </a:rPr>
               <a:t>It worked. That is not the same as saying you will ever do it again.</a:t>
             </a:r>
@@ -9664,11 +9048,11 @@
               </a:spcAft>
             </a:pPr>
             <a:r>
-              <a:rPr sz="1200" b="1" i="0">
+              <a:rPr sz="1200" b="0" i="0">
                 <a:solidFill>
                   <a:srgbClr val="FFFDF7"/>
                 </a:solidFill>
-                <a:latin typeface="Libre Caslon Display"/>
+                <a:latin typeface="Georgia"/>
               </a:rPr>
               <a:t>1</a:t>
             </a:r>
@@ -9710,7 +9094,7 @@
                 <a:solidFill>
                   <a:srgbClr val="2F2A36"/>
                 </a:solidFill>
-                <a:latin typeface="Karla"/>
+                <a:latin typeface="Calibri"/>
               </a:rPr>
               <a:t>Would you have done those five minutes if nobody had told you to?</a:t>
             </a:r>
@@ -9840,11 +9224,11 @@
               </a:spcAft>
             </a:pPr>
             <a:r>
-              <a:rPr sz="1200" b="1" i="0">
+              <a:rPr sz="1200" b="0" i="0">
                 <a:solidFill>
                   <a:srgbClr val="FFFDF7"/>
                 </a:solidFill>
-                <a:latin typeface="Libre Caslon Display"/>
+                <a:latin typeface="Georgia"/>
               </a:rPr>
               <a:t>2</a:t>
             </a:r>
@@ -9886,7 +9270,7 @@
                 <a:solidFill>
                   <a:srgbClr val="2F2A36"/>
                 </a:solidFill>
-                <a:latin typeface="Karla"/>
+                <a:latin typeface="Calibri"/>
               </a:rPr>
               <a:t>What is the actual thing that would stop you at home?</a:t>
             </a:r>
@@ -10016,11 +9400,11 @@
               </a:spcAft>
             </a:pPr>
             <a:r>
-              <a:rPr sz="1200" b="1" i="0">
+              <a:rPr sz="1200" b="0" i="0">
                 <a:solidFill>
                   <a:srgbClr val="FFFDF7"/>
                 </a:solidFill>
-                <a:latin typeface="Libre Caslon Display"/>
+                <a:latin typeface="Georgia"/>
               </a:rPr>
               <a:t>3</a:t>
             </a:r>
@@ -10062,7 +9446,7 @@
                 <a:solidFill>
                   <a:srgbClr val="2F2A36"/>
                 </a:solidFill>
-                <a:latin typeface="Karla"/>
+                <a:latin typeface="Calibri"/>
               </a:rPr>
               <a:t>What is the smallest version of it you would still bother with?</a:t>
             </a:r>
@@ -10104,7 +9488,7 @@
                 <a:solidFill>
                   <a:srgbClr val="502961"/>
                 </a:solidFill>
-                <a:latin typeface="Karla"/>
+                <a:latin typeface="Calibri"/>
               </a:rPr>
               <a:t>The third question is next lesson. Almost nobody keeps up the big version.</a:t>
             </a:r>
@@ -10170,7 +9554,7 @@
                 <a:solidFill>
                   <a:srgbClr val="9C95A3"/>
                 </a:solidFill>
-                <a:latin typeface="Karla"/>
+                <a:latin typeface="Calibri"/>
               </a:rPr>
               <a:t>The Pastoral Guide</a:t>
             </a:r>
@@ -10212,7 +9596,7 @@
                 <a:solidFill>
                   <a:srgbClr val="9C95A3"/>
                 </a:solidFill>
-                <a:latin typeface="Karla"/>
+                <a:latin typeface="Calibri"/>
               </a:rPr>
               <a:t>16 / 19</a:t>
             </a:r>
@@ -10316,7 +9700,7 @@
                 <a:solidFill>
                   <a:srgbClr val="502961"/>
                 </a:solidFill>
-                <a:latin typeface="Karla"/>
+                <a:latin typeface="Calibri"/>
               </a:rPr>
               <a:t>NEXT LESSON</a:t>
             </a:r>
@@ -10404,7 +9788,7 @@
                 <a:solidFill>
                   <a:srgbClr val="502961"/>
                 </a:solidFill>
-                <a:latin typeface="Karla"/>
+                <a:latin typeface="Calibri"/>
               </a:rPr>
               <a:t>NEXT WEEK</a:t>
             </a:r>
@@ -10442,11 +9826,11 @@
               </a:spcAft>
             </a:pPr>
             <a:r>
-              <a:rPr sz="3200" b="1" i="0">
+              <a:rPr sz="3200" b="0" i="0">
                 <a:solidFill>
                   <a:srgbClr val="2F2A36"/>
                 </a:solidFill>
-                <a:latin typeface="Libre Caslon Display"/>
+                <a:latin typeface="Georgia"/>
               </a:rPr>
               <a:t>You design four weeks</a:t>
             </a:r>
@@ -10488,7 +9872,7 @@
                 <a:solidFill>
                   <a:srgbClr val="635C6B"/>
                 </a:solidFill>
-                <a:latin typeface="Karla"/>
+                <a:latin typeface="Calibri"/>
               </a:rPr>
               <a:t>On a card, and it gets marked against four tests by somebody who is not you.</a:t>
             </a:r>
@@ -10574,11 +9958,11 @@
               </a:spcAft>
             </a:pPr>
             <a:r>
-              <a:rPr sz="1350" b="1" i="0">
+              <a:rPr sz="1350" b="0" i="0">
                 <a:solidFill>
                   <a:srgbClr val="502961"/>
                 </a:solidFill>
-                <a:latin typeface="Libre Caslon Display"/>
+                <a:latin typeface="Georgia"/>
               </a:rPr>
               <a:t>Week one is tiny</a:t>
             </a:r>
@@ -10620,7 +10004,7 @@
                 <a:solidFill>
                   <a:srgbClr val="635C6B"/>
                 </a:solidFill>
-                <a:latin typeface="Karla"/>
+                <a:latin typeface="Calibri"/>
               </a:rPr>
               <a:t>Smaller than you think. That is what makes it work.</a:t>
             </a:r>
@@ -10706,11 +10090,11 @@
               </a:spcAft>
             </a:pPr>
             <a:r>
-              <a:rPr sz="1350" b="1" i="0">
+              <a:rPr sz="1350" b="0" i="0">
                 <a:solidFill>
                   <a:srgbClr val="502961"/>
                 </a:solidFill>
-                <a:latin typeface="Libre Caslon Display"/>
+                <a:latin typeface="Georgia"/>
               </a:rPr>
               <a:t>It grows slowly</a:t>
             </a:r>
@@ -10752,7 +10136,7 @@
                 <a:solidFill>
                   <a:srgbClr val="635C6B"/>
                 </a:solidFill>
-                <a:latin typeface="Karla"/>
+                <a:latin typeface="Calibri"/>
               </a:rPr>
               <a:t>Four weeks, and week four is still nothing dramatic.</a:t>
             </a:r>
@@ -10838,11 +10222,11 @@
               </a:spcAft>
             </a:pPr>
             <a:r>
-              <a:rPr sz="1350" b="1" i="0">
+              <a:rPr sz="1350" b="0" i="0">
                 <a:solidFill>
                   <a:srgbClr val="502961"/>
                 </a:solidFill>
-                <a:latin typeface="Libre Caslon Display"/>
+                <a:latin typeface="Georgia"/>
               </a:rPr>
               <a:t>Bring nothing</a:t>
             </a:r>
@@ -10884,7 +10268,7 @@
                 <a:solidFill>
                   <a:srgbClr val="635C6B"/>
                 </a:solidFill>
-                <a:latin typeface="Karla"/>
+                <a:latin typeface="Calibri"/>
               </a:rPr>
               <a:t>No kit, no app, no gym. It has to work in your house.</a:t>
             </a:r>
@@ -10926,7 +10310,7 @@
                 <a:solidFill>
                   <a:srgbClr val="502961"/>
                 </a:solidFill>
-                <a:latin typeface="Karla"/>
+                <a:latin typeface="Calibri"/>
               </a:rPr>
               <a:t>Bring your sheet. The numbers on it are the reason your plan is worth writing.</a:t>
             </a:r>
@@ -10992,7 +10376,7 @@
                 <a:solidFill>
                   <a:srgbClr val="9C95A3"/>
                 </a:solidFill>
-                <a:latin typeface="Karla"/>
+                <a:latin typeface="Calibri"/>
               </a:rPr>
               <a:t>The Pastoral Guide</a:t>
             </a:r>
@@ -11034,7 +10418,7 @@
                 <a:solidFill>
                   <a:srgbClr val="9C95A3"/>
                 </a:solidFill>
-                <a:latin typeface="Karla"/>
+                <a:latin typeface="Calibri"/>
               </a:rPr>
               <a:t>17 / 19</a:t>
             </a:r>
@@ -11138,7 +10522,7 @@
                 <a:solidFill>
                   <a:srgbClr val="D8BCE4"/>
                 </a:solidFill>
-                <a:latin typeface="Karla"/>
+                <a:latin typeface="Calibri"/>
               </a:rPr>
               <a:t>IF YOU REMEMBER ONE THING</a:t>
             </a:r>
@@ -11176,21 +10560,21 @@
               </a:spcAft>
             </a:pPr>
             <a:r>
-              <a:rPr sz="3400" b="1" i="0">
+              <a:rPr sz="3400" b="0" i="0">
                 <a:solidFill>
                   <a:srgbClr val="FFFDF7"/>
                 </a:solidFill>
-                <a:latin typeface="Libre Caslon Display"/>
+                <a:latin typeface="Georgia"/>
               </a:rPr>
               <a:t>Your heart went back to normal.</a:t>
             </a:r>
             <a:br/>
             <a:r>
-              <a:rPr sz="3400" b="1" i="0">
+              <a:rPr sz="3400" b="0" i="0">
                 <a:solidFill>
                   <a:srgbClr val="FFFDF7"/>
                 </a:solidFill>
-                <a:latin typeface="Libre Caslon Display"/>
+                <a:latin typeface="Georgia"/>
               </a:rPr>
               <a:t>Your head took longer.</a:t>
             </a:r>
@@ -11276,7 +10660,7 @@
                 <a:solidFill>
                   <a:srgbClr val="D8BCE4"/>
                 </a:solidFill>
-                <a:latin typeface="Karla"/>
+                <a:latin typeface="Calibri"/>
               </a:rPr>
               <a:t>That gap is the whole reason to bother,</a:t>
             </a:r>
@@ -11286,7 +10670,7 @@
                 <a:solidFill>
                   <a:srgbClr val="D8BCE4"/>
                 </a:solidFill>
-                <a:latin typeface="Karla"/>
+                <a:latin typeface="Calibri"/>
               </a:rPr>
               <a:t>and you measured it yourself.</a:t>
             </a:r>
@@ -11352,7 +10736,7 @@
                 <a:solidFill>
                   <a:srgbClr val="D8BCE4"/>
                 </a:solidFill>
-                <a:latin typeface="Karla"/>
+                <a:latin typeface="Calibri"/>
               </a:rPr>
               <a:t>The Pastoral Guide</a:t>
             </a:r>
@@ -11394,7 +10778,7 @@
                 <a:solidFill>
                   <a:srgbClr val="D8BCE4"/>
                 </a:solidFill>
-                <a:latin typeface="Karla"/>
+                <a:latin typeface="Calibri"/>
               </a:rPr>
               <a:t>18 / 19</a:t>
             </a:r>
@@ -11518,11 +10902,11 @@
               </a:spcAft>
             </a:pPr>
             <a:r>
-              <a:rPr sz="3000" b="1" i="0">
+              <a:rPr sz="3000" b="0" i="0">
                 <a:solidFill>
                   <a:srgbClr val="502961"/>
                 </a:solidFill>
-                <a:latin typeface="Libre Caslon Display"/>
+                <a:latin typeface="Georgia"/>
               </a:rPr>
               <a:t>Bring your sheet next week.</a:t>
             </a:r>
@@ -11564,7 +10948,7 @@
                 <a:solidFill>
                   <a:srgbClr val="635C6B"/>
                 </a:solidFill>
-                <a:latin typeface="Karla"/>
+                <a:latin typeface="Calibri"/>
               </a:rPr>
               <a:t>You are going to turn three numbers</a:t>
             </a:r>
@@ -11574,7 +10958,7 @@
                 <a:solidFill>
                   <a:srgbClr val="635C6B"/>
                 </a:solidFill>
-                <a:latin typeface="Karla"/>
+                <a:latin typeface="Calibri"/>
               </a:rPr>
               <a:t>into four weeks you would actually do.</a:t>
             </a:r>
@@ -11616,7 +11000,7 @@
                 <a:solidFill>
                   <a:srgbClr val="9C95A3"/>
                 </a:solidFill>
-                <a:latin typeface="Karla"/>
+                <a:latin typeface="Calibri"/>
               </a:rPr>
               <a:t>Movement and Mental Health  ·  Lesson 2 of 3</a:t>
             </a:r>
@@ -11682,7 +11066,7 @@
                 <a:solidFill>
                   <a:srgbClr val="9C95A3"/>
                 </a:solidFill>
-                <a:latin typeface="Karla"/>
+                <a:latin typeface="Calibri"/>
               </a:rPr>
               <a:t>The Pastoral Guide</a:t>
             </a:r>
@@ -11724,7 +11108,7 @@
                 <a:solidFill>
                   <a:srgbClr val="9C95A3"/>
                 </a:solidFill>
-                <a:latin typeface="Karla"/>
+                <a:latin typeface="Calibri"/>
               </a:rPr>
               <a:t>19 / 19</a:t>
             </a:r>
@@ -11874,7 +11258,7 @@
                 <a:solidFill>
                   <a:srgbClr val="502961"/>
                 </a:solidFill>
-                <a:latin typeface="Karla"/>
+                <a:latin typeface="Calibri"/>
               </a:rPr>
               <a:t>TEACHER SLIDE  ·  SKIP IT</a:t>
             </a:r>
@@ -11916,7 +11300,7 @@
                 <a:solidFill>
                   <a:srgbClr val="502961"/>
                 </a:solidFill>
-                <a:latin typeface="Karla"/>
+                <a:latin typeface="Calibri"/>
               </a:rPr>
               <a:t>BEFORE THEY COME IN</a:t>
             </a:r>
@@ -11954,11 +11338,11 @@
               </a:spcAft>
             </a:pPr>
             <a:r>
-              <a:rPr sz="3100" b="1" i="0">
+              <a:rPr sz="3100" b="0" i="0">
                 <a:solidFill>
                   <a:srgbClr val="2F2A36"/>
                 </a:solidFill>
-                <a:latin typeface="Libre Caslon Display"/>
+                <a:latin typeface="Georgia"/>
               </a:rPr>
               <a:t>Four things to set up</a:t>
             </a:r>
@@ -12088,11 +11472,11 @@
               </a:spcAft>
             </a:pPr>
             <a:r>
-              <a:rPr sz="1200" b="1" i="0">
+              <a:rPr sz="1200" b="0" i="0">
                 <a:solidFill>
                   <a:srgbClr val="FFFDF7"/>
                 </a:solidFill>
-                <a:latin typeface="Libre Caslon Display"/>
+                <a:latin typeface="Georgia"/>
               </a:rPr>
               <a:t>1</a:t>
             </a:r>
@@ -12130,11 +11514,11 @@
               </a:spcAft>
             </a:pPr>
             <a:r>
-              <a:rPr sz="1300" b="1" i="0">
+              <a:rPr sz="1300" b="0" i="0">
                 <a:solidFill>
                   <a:srgbClr val="502961"/>
                 </a:solidFill>
-                <a:latin typeface="Libre Caslon Display"/>
+                <a:latin typeface="Georgia"/>
               </a:rPr>
               <a:t>Space by the chairs</a:t>
             </a:r>
@@ -12176,7 +11560,7 @@
                 <a:solidFill>
                   <a:srgbClr val="635C6B"/>
                 </a:solidFill>
-                <a:latin typeface="Karla"/>
+                <a:latin typeface="Calibri"/>
               </a:rPr>
               <a:t>Bags under desks, chairs pushed in. Nobody needs more than a step in any direction.</a:t>
             </a:r>
@@ -12306,11 +11690,11 @@
               </a:spcAft>
             </a:pPr>
             <a:r>
-              <a:rPr sz="1200" b="1" i="0">
+              <a:rPr sz="1200" b="0" i="0">
                 <a:solidFill>
                   <a:srgbClr val="FFFDF7"/>
                 </a:solidFill>
-                <a:latin typeface="Libre Caslon Display"/>
+                <a:latin typeface="Georgia"/>
               </a:rPr>
               <a:t>2</a:t>
             </a:r>
@@ -12348,11 +11732,11 @@
               </a:spcAft>
             </a:pPr>
             <a:r>
-              <a:rPr sz="1300" b="1" i="0">
+              <a:rPr sz="1300" b="0" i="0">
                 <a:solidFill>
                   <a:srgbClr val="502961"/>
                 </a:solidFill>
-                <a:latin typeface="Libre Caslon Display"/>
+                <a:latin typeface="Georgia"/>
               </a:rPr>
               <a:t>Last week’s sheets</a:t>
             </a:r>
@@ -12394,7 +11778,7 @@
                 <a:solidFill>
                   <a:srgbClr val="635C6B"/>
                 </a:solidFill>
-                <a:latin typeface="Karla"/>
+                <a:latin typeface="Calibri"/>
               </a:rPr>
               <a:t>Spares on page 3 of the pack. Without a prediction there is nothing to test.</a:t>
             </a:r>
@@ -12524,11 +11908,11 @@
               </a:spcAft>
             </a:pPr>
             <a:r>
-              <a:rPr sz="1200" b="1" i="0">
+              <a:rPr sz="1200" b="0" i="0">
                 <a:solidFill>
                   <a:srgbClr val="FFFDF7"/>
                 </a:solidFill>
-                <a:latin typeface="Libre Caslon Display"/>
+                <a:latin typeface="Georgia"/>
               </a:rPr>
               <a:t>3</a:t>
             </a:r>
@@ -12566,11 +11950,11 @@
               </a:spcAft>
             </a:pPr>
             <a:r>
-              <a:rPr sz="1300" b="1" i="0">
+              <a:rPr sz="1300" b="0" i="0">
                 <a:solidFill>
                   <a:srgbClr val="502961"/>
                 </a:solidFill>
-                <a:latin typeface="Libre Caslon Display"/>
+                <a:latin typeface="Georgia"/>
               </a:rPr>
               <a:t>Two columns on the board</a:t>
             </a:r>
@@ -12612,7 +11996,7 @@
                 <a:solidFill>
                   <a:srgbClr val="635C6B"/>
                 </a:solidFill>
-                <a:latin typeface="Karla"/>
+                <a:latin typeface="Calibri"/>
               </a:rPr>
               <a:t>Pulse change and focus change. You are tallying bands, not averages.</a:t>
             </a:r>
@@ -12742,11 +12126,11 @@
               </a:spcAft>
             </a:pPr>
             <a:r>
-              <a:rPr sz="1200" b="1" i="0">
+              <a:rPr sz="1200" b="0" i="0">
                 <a:solidFill>
                   <a:srgbClr val="FFFDF7"/>
                 </a:solidFill>
-                <a:latin typeface="Libre Caslon Display"/>
+                <a:latin typeface="Georgia"/>
               </a:rPr>
               <a:t>4</a:t>
             </a:r>
@@ -12784,11 +12168,11 @@
               </a:spcAft>
             </a:pPr>
             <a:r>
-              <a:rPr sz="1300" b="1" i="0">
+              <a:rPr sz="1300" b="0" i="0">
                 <a:solidFill>
                   <a:srgbClr val="502961"/>
                 </a:solidFill>
-                <a:latin typeface="Libre Caslon Display"/>
+                <a:latin typeface="Georgia"/>
               </a:rPr>
               <a:t>Your own list</a:t>
             </a:r>
@@ -12830,7 +12214,7 @@
                 <a:solidFill>
                   <a:srgbClr val="635C6B"/>
                 </a:solidFill>
-                <a:latin typeface="Karla"/>
+                <a:latin typeface="Calibri"/>
               </a:rPr>
               <a:t>Asthma, injuries, anything that makes this a bad idea. Check records, not memories.</a:t>
             </a:r>
@@ -12872,7 +12256,7 @@
                 <a:solidFill>
                   <a:srgbClr val="502961"/>
                 </a:solidFill>
-                <a:latin typeface="Karla"/>
+                <a:latin typeface="Calibri"/>
               </a:rPr>
               <a:t>No kit, no changing, no leaving the room. The whole practical is five minutes long.</a:t>
             </a:r>
@@ -12938,7 +12322,7 @@
                 <a:solidFill>
                   <a:srgbClr val="9C95A3"/>
                 </a:solidFill>
-                <a:latin typeface="Karla"/>
+                <a:latin typeface="Calibri"/>
               </a:rPr>
               <a:t>The Pastoral Guide</a:t>
             </a:r>
@@ -12980,7 +12364,7 @@
                 <a:solidFill>
                   <a:srgbClr val="9C95A3"/>
                 </a:solidFill>
-                <a:latin typeface="Karla"/>
+                <a:latin typeface="Calibri"/>
               </a:rPr>
               <a:t>2 / 19</a:t>
             </a:r>
@@ -13084,97 +12468,9 @@
                 <a:solidFill>
                   <a:srgbClr val="D8BCE4"/>
                 </a:solidFill>
-                <a:latin typeface="Karla"/>
+                <a:latin typeface="Calibri"/>
               </a:rPr>
               <a:t>FROM LAST WEEK</a:t>
-            </a:r>
-          </a:p>
-        </p:txBody>
-      </p:sp>
-      <p:sp>
-        <p:nvSpPr>
-          <p:cNvPr id="4" name="Rounded Rectangle 3"/>
-          <p:cNvSpPr/>
-          <p:nvPr/>
-        </p:nvSpPr>
-        <p:spPr>
-          <a:xfrm>
-            <a:off x="7086600" y="530352"/>
-            <a:ext cx="1371600" cy="347472"/>
-          </a:xfrm>
-          <a:prstGeom prst="roundRect">
-            <a:avLst>
-              <a:gd name="adj" fmla="val 50000"/>
-            </a:avLst>
-          </a:prstGeom>
-          <a:solidFill>
-            <a:srgbClr val="FFFDF7"/>
-          </a:solidFill>
-          <a:ln>
-            <a:noFill/>
-          </a:ln>
-          <a:effectLst/>
-        </p:spPr>
-        <p:style>
-          <a:lnRef idx="1">
-            <a:schemeClr val="accent1"/>
-          </a:lnRef>
-          <a:fillRef idx="3">
-            <a:schemeClr val="accent1"/>
-          </a:fillRef>
-          <a:effectRef idx="2">
-            <a:schemeClr val="accent1"/>
-          </a:effectRef>
-          <a:fontRef idx="minor">
-            <a:schemeClr val="lt1"/>
-          </a:fontRef>
-        </p:style>
-        <p:txBody>
-          <a:bodyPr rtlCol="0" anchor="ctr"/>
-          <a:lstStyle/>
-          <a:p>
-            <a:pPr algn="ctr"/>
-          </a:p>
-        </p:txBody>
-      </p:sp>
-      <p:sp>
-        <p:nvSpPr>
-          <p:cNvPr id="5" name="TextBox 4"/>
-          <p:cNvSpPr txBox="1"/>
-          <p:nvPr/>
-        </p:nvSpPr>
-        <p:spPr>
-          <a:xfrm>
-            <a:off x="7086600" y="589788"/>
-            <a:ext cx="1371600" cy="237744"/>
-          </a:xfrm>
-          <a:prstGeom prst="rect">
-            <a:avLst/>
-          </a:prstGeom>
-          <a:noFill/>
-        </p:spPr>
-        <p:txBody>
-          <a:bodyPr wrap="square" lIns="0" rIns="0" tIns="0" bIns="0" anchor="t">
-            <a:spAutoFit/>
-          </a:bodyPr>
-          <a:lstStyle/>
-          <a:p>
-            <a:pPr algn="ctr">
-              <a:lnSpc>
-                <a:spcPct val="125000"/>
-              </a:lnSpc>
-              <a:spcAft>
-                <a:spcPts val="0"/>
-              </a:spcAft>
-            </a:pPr>
-            <a:r>
-              <a:rPr sz="1000" b="1" i="0" spc="100">
-                <a:solidFill>
-                  <a:srgbClr val="502961"/>
-                </a:solidFill>
-                <a:latin typeface="Karla"/>
-              </a:rPr>
-              <a:t>RECAP</a:t>
             </a:r>
           </a:p>
         </p:txBody>
@@ -13210,11 +12506,11 @@
               </a:spcAft>
             </a:pPr>
             <a:r>
-              <a:rPr sz="2800" b="1" i="0">
+              <a:rPr sz="2800" b="0" i="0">
                 <a:solidFill>
                   <a:srgbClr val="FFFDF7"/>
                 </a:solidFill>
-                <a:latin typeface="Libre Caslon Display"/>
+                <a:latin typeface="Georgia"/>
               </a:rPr>
               <a:t>You already wrote the answer down</a:t>
             </a:r>
@@ -13344,11 +12640,11 @@
               </a:spcAft>
             </a:pPr>
             <a:r>
-              <a:rPr sz="1300" b="1" i="0">
+              <a:rPr sz="1300" b="0" i="0">
                 <a:solidFill>
                   <a:srgbClr val="FFFDF7"/>
                 </a:solidFill>
-                <a:latin typeface="Libre Caslon Display"/>
+                <a:latin typeface="Georgia"/>
               </a:rPr>
               <a:t>1</a:t>
             </a:r>
@@ -13386,11 +12682,11 @@
               </a:spcAft>
             </a:pPr>
             <a:r>
-              <a:rPr sz="1350" b="1" i="0">
+              <a:rPr sz="1350" b="0" i="0">
                 <a:solidFill>
                   <a:srgbClr val="502961"/>
                 </a:solidFill>
-                <a:latin typeface="Libre Caslon Display"/>
+                <a:latin typeface="Georgia"/>
               </a:rPr>
               <a:t>Your pulse</a:t>
             </a:r>
@@ -13432,7 +12728,7 @@
                 <a:solidFill>
                   <a:srgbClr val="635C6B"/>
                 </a:solidFill>
-                <a:latin typeface="Karla"/>
+                <a:latin typeface="Calibri"/>
               </a:rPr>
               <a:t>Beats per minute. Fifteen seconds, times four.</a:t>
             </a:r>
@@ -13562,11 +12858,11 @@
               </a:spcAft>
             </a:pPr>
             <a:r>
-              <a:rPr sz="1300" b="1" i="0">
+              <a:rPr sz="1300" b="0" i="0">
                 <a:solidFill>
                   <a:srgbClr val="FFFDF7"/>
                 </a:solidFill>
-                <a:latin typeface="Libre Caslon Display"/>
+                <a:latin typeface="Georgia"/>
               </a:rPr>
               <a:t>2</a:t>
             </a:r>
@@ -13604,11 +12900,11 @@
               </a:spcAft>
             </a:pPr>
             <a:r>
-              <a:rPr sz="1350" b="1" i="0">
+              <a:rPr sz="1350" b="0" i="0">
                 <a:solidFill>
                   <a:srgbClr val="502961"/>
                 </a:solidFill>
-                <a:latin typeface="Libre Caslon Display"/>
+                <a:latin typeface="Georgia"/>
               </a:rPr>
               <a:t>Your focus score</a:t>
             </a:r>
@@ -13650,7 +12946,7 @@
                 <a:solidFill>
                   <a:srgbClr val="635C6B"/>
                 </a:solidFill>
-                <a:latin typeface="Karla"/>
+                <a:latin typeface="Calibri"/>
               </a:rPr>
               <a:t>Out of ten. Could you start a piece of work right now?</a:t>
             </a:r>
@@ -13780,11 +13076,11 @@
               </a:spcAft>
             </a:pPr>
             <a:r>
-              <a:rPr sz="1300" b="1" i="0">
+              <a:rPr sz="1300" b="0" i="0">
                 <a:solidFill>
                   <a:srgbClr val="FFFDF7"/>
                 </a:solidFill>
-                <a:latin typeface="Libre Caslon Display"/>
+                <a:latin typeface="Georgia"/>
               </a:rPr>
               <a:t>3</a:t>
             </a:r>
@@ -13822,11 +13118,11 @@
               </a:spcAft>
             </a:pPr>
             <a:r>
-              <a:rPr sz="1350" b="1" i="0">
+              <a:rPr sz="1350" b="0" i="0">
                 <a:solidFill>
                   <a:srgbClr val="502961"/>
                 </a:solidFill>
-                <a:latin typeface="Libre Caslon Display"/>
+                <a:latin typeface="Georgia"/>
               </a:rPr>
               <a:t>Your prediction</a:t>
             </a:r>
@@ -13868,7 +13164,7 @@
                 <a:solidFill>
                   <a:srgbClr val="635C6B"/>
                 </a:solidFill>
-                <a:latin typeface="Karla"/>
+                <a:latin typeface="Calibri"/>
               </a:rPr>
               <a:t>What both of those would do after five minutes of moving.</a:t>
             </a:r>
@@ -13910,7 +13206,7 @@
                 <a:solidFill>
                   <a:srgbClr val="FFFDF7"/>
                 </a:solidFill>
-                <a:latin typeface="Karla"/>
+                <a:latin typeface="Calibri"/>
               </a:rPr>
               <a:t>Sheet out, prediction where you can see it. You are about to find out.</a:t>
             </a:r>
@@ -13976,7 +13272,7 @@
                 <a:solidFill>
                   <a:srgbClr val="D8BCE4"/>
                 </a:solidFill>
-                <a:latin typeface="Karla"/>
+                <a:latin typeface="Calibri"/>
               </a:rPr>
               <a:t>The Pastoral Guide</a:t>
             </a:r>
@@ -14018,7 +13314,7 @@
                 <a:solidFill>
                   <a:srgbClr val="D8BCE4"/>
                 </a:solidFill>
-                <a:latin typeface="Karla"/>
+                <a:latin typeface="Calibri"/>
               </a:rPr>
               <a:t>3 / 19</a:t>
             </a:r>
@@ -14122,7 +13418,7 @@
                 <a:solidFill>
                   <a:srgbClr val="502961"/>
                 </a:solidFill>
-                <a:latin typeface="Karla"/>
+                <a:latin typeface="Calibri"/>
               </a:rPr>
               <a:t>NOT OPTIONAL, NOT NEGOTIABLE</a:t>
             </a:r>
@@ -14210,7 +13506,7 @@
                 <a:solidFill>
                   <a:srgbClr val="502961"/>
                 </a:solidFill>
-                <a:latin typeface="Karla"/>
+                <a:latin typeface="Calibri"/>
               </a:rPr>
               <a:t>SAFETY</a:t>
             </a:r>
@@ -14248,11 +13544,11 @@
               </a:spcAft>
             </a:pPr>
             <a:r>
-              <a:rPr sz="3200" b="1" i="0">
+              <a:rPr sz="3200" b="0" i="0">
                 <a:solidFill>
                   <a:srgbClr val="2F2A36"/>
                 </a:solidFill>
-                <a:latin typeface="Libre Caslon Display"/>
+                <a:latin typeface="Georgia"/>
               </a:rPr>
               <a:t>Before anybody moves</a:t>
             </a:r>
@@ -14342,7 +13638,7 @@
                 <a:solidFill>
                   <a:srgbClr val="2F2A36"/>
                 </a:solidFill>
-                <a:latin typeface="Karla"/>
+                <a:latin typeface="Calibri"/>
               </a:rPr>
               <a:t>Asthma, an injury, anything that makes this a bad idea. Tell your teacher now.</a:t>
             </a:r>
@@ -14432,7 +13728,7 @@
                 <a:solidFill>
                   <a:srgbClr val="2F2A36"/>
                 </a:solidFill>
-                <a:latin typeface="Karla"/>
+                <a:latin typeface="Calibri"/>
               </a:rPr>
               <a:t>Every option has a seated version. Taking it is not opting out of anything.</a:t>
             </a:r>
@@ -14522,7 +13818,7 @@
                 <a:solidFill>
                   <a:srgbClr val="2F2A36"/>
                 </a:solidFill>
-                <a:latin typeface="Karla"/>
+                <a:latin typeface="Calibri"/>
               </a:rPr>
               <a:t>Dizzy, breathless in a way that worries you, or in pain? Sit down and say so.</a:t>
             </a:r>
@@ -14612,7 +13908,7 @@
                 <a:solidFill>
                   <a:srgbClr val="2F2A36"/>
                 </a:solidFill>
-                <a:latin typeface="Karla"/>
+                <a:latin typeface="Calibri"/>
               </a:rPr>
               <a:t>You stay by your own chair. Nobody crosses the room and nobody touches anybody.</a:t>
             </a:r>
@@ -14702,7 +13998,7 @@
                 <a:solidFill>
                   <a:srgbClr val="2F2A36"/>
                 </a:solidFill>
-                <a:latin typeface="Karla"/>
+                <a:latin typeface="Calibri"/>
               </a:rPr>
               <a:t>Nobody sees your numbers except you. They go on your sheet, not on the board.</a:t>
             </a:r>
@@ -14744,7 +14040,7 @@
                 <a:solidFill>
                   <a:srgbClr val="502961"/>
                 </a:solidFill>
-                <a:latin typeface="Karla"/>
+                <a:latin typeface="Calibri"/>
               </a:rPr>
               <a:t>Anyone who cannot follow these five records the class numbers instead.</a:t>
             </a:r>
@@ -14810,7 +14106,7 @@
                 <a:solidFill>
                   <a:srgbClr val="9C95A3"/>
                 </a:solidFill>
-                <a:latin typeface="Karla"/>
+                <a:latin typeface="Calibri"/>
               </a:rPr>
               <a:t>The Pastoral Guide</a:t>
             </a:r>
@@ -14852,7 +14148,7 @@
                 <a:solidFill>
                   <a:srgbClr val="9C95A3"/>
                 </a:solidFill>
-                <a:latin typeface="Karla"/>
+                <a:latin typeface="Calibri"/>
               </a:rPr>
               <a:t>4 / 19</a:t>
             </a:r>
@@ -14956,97 +14252,9 @@
                 <a:solidFill>
                   <a:srgbClr val="502961"/>
                 </a:solidFill>
-                <a:latin typeface="Karla"/>
+                <a:latin typeface="Calibri"/>
               </a:rPr>
               <a:t>COLUMN A ON YOUR SHEET</a:t>
-            </a:r>
-          </a:p>
-        </p:txBody>
-      </p:sp>
-      <p:sp>
-        <p:nvSpPr>
-          <p:cNvPr id="4" name="Rounded Rectangle 3"/>
-          <p:cNvSpPr/>
-          <p:nvPr/>
-        </p:nvSpPr>
-        <p:spPr>
-          <a:xfrm>
-            <a:off x="7086600" y="530352"/>
-            <a:ext cx="1371600" cy="347472"/>
-          </a:xfrm>
-          <a:prstGeom prst="roundRect">
-            <a:avLst>
-              <a:gd name="adj" fmla="val 50000"/>
-            </a:avLst>
-          </a:prstGeom>
-          <a:solidFill>
-            <a:srgbClr val="F0E4F5"/>
-          </a:solidFill>
-          <a:ln>
-            <a:noFill/>
-          </a:ln>
-          <a:effectLst/>
-        </p:spPr>
-        <p:style>
-          <a:lnRef idx="1">
-            <a:schemeClr val="accent1"/>
-          </a:lnRef>
-          <a:fillRef idx="3">
-            <a:schemeClr val="accent1"/>
-          </a:fillRef>
-          <a:effectRef idx="2">
-            <a:schemeClr val="accent1"/>
-          </a:effectRef>
-          <a:fontRef idx="minor">
-            <a:schemeClr val="lt1"/>
-          </a:fontRef>
-        </p:style>
-        <p:txBody>
-          <a:bodyPr rtlCol="0" anchor="ctr"/>
-          <a:lstStyle/>
-          <a:p>
-            <a:pPr algn="ctr"/>
-          </a:p>
-        </p:txBody>
-      </p:sp>
-      <p:sp>
-        <p:nvSpPr>
-          <p:cNvPr id="5" name="TextBox 4"/>
-          <p:cNvSpPr txBox="1"/>
-          <p:nvPr/>
-        </p:nvSpPr>
-        <p:spPr>
-          <a:xfrm>
-            <a:off x="7086600" y="589788"/>
-            <a:ext cx="1371600" cy="237744"/>
-          </a:xfrm>
-          <a:prstGeom prst="rect">
-            <a:avLst/>
-          </a:prstGeom>
-          <a:noFill/>
-        </p:spPr>
-        <p:txBody>
-          <a:bodyPr wrap="square" lIns="0" rIns="0" tIns="0" bIns="0" anchor="t">
-            <a:spAutoFit/>
-          </a:bodyPr>
-          <a:lstStyle/>
-          <a:p>
-            <a:pPr algn="ctr">
-              <a:lnSpc>
-                <a:spcPct val="125000"/>
-              </a:lnSpc>
-              <a:spcAft>
-                <a:spcPts val="0"/>
-              </a:spcAft>
-            </a:pPr>
-            <a:r>
-              <a:rPr sz="1000" b="1" i="0" spc="100">
-                <a:solidFill>
-                  <a:srgbClr val="502961"/>
-                </a:solidFill>
-                <a:latin typeface="Karla"/>
-              </a:rPr>
-              <a:t>MEASURE</a:t>
             </a:r>
           </a:p>
         </p:txBody>
@@ -15082,11 +14290,11 @@
               </a:spcAft>
             </a:pPr>
             <a:r>
-              <a:rPr sz="3200" b="1" i="0">
+              <a:rPr sz="3200" b="0" i="0">
                 <a:solidFill>
                   <a:srgbClr val="2F2A36"/>
                 </a:solidFill>
-                <a:latin typeface="Libre Caslon Display"/>
+                <a:latin typeface="Georgia"/>
               </a:rPr>
               <a:t>Before you do anything</a:t>
             </a:r>
@@ -15128,7 +14336,7 @@
                 <a:solidFill>
                   <a:srgbClr val="635C6B"/>
                 </a:solidFill>
-                <a:latin typeface="Karla"/>
+                <a:latin typeface="Calibri"/>
               </a:rPr>
               <a:t>Sitting down, quiet, no talking. Thirty seconds of stillness first, then measure.</a:t>
             </a:r>
@@ -15214,11 +14422,11 @@
               </a:spcAft>
             </a:pPr>
             <a:r>
-              <a:rPr sz="1350" b="1" i="0">
+              <a:rPr sz="1350" b="0" i="0">
                 <a:solidFill>
                   <a:srgbClr val="502961"/>
                 </a:solidFill>
-                <a:latin typeface="Libre Caslon Display"/>
+                <a:latin typeface="Georgia"/>
               </a:rPr>
               <a:t>Pulse</a:t>
             </a:r>
@@ -15260,7 +14468,7 @@
                 <a:solidFill>
                   <a:srgbClr val="635C6B"/>
                 </a:solidFill>
-                <a:latin typeface="Karla"/>
+                <a:latin typeface="Calibri"/>
               </a:rPr>
               <a:t>Fifteen seconds, times four. Write it in column A.</a:t>
             </a:r>
@@ -15346,11 +14554,11 @@
               </a:spcAft>
             </a:pPr>
             <a:r>
-              <a:rPr sz="1350" b="1" i="0">
+              <a:rPr sz="1350" b="0" i="0">
                 <a:solidFill>
                   <a:srgbClr val="502961"/>
                 </a:solidFill>
-                <a:latin typeface="Libre Caslon Display"/>
+                <a:latin typeface="Georgia"/>
               </a:rPr>
               <a:t>Focus</a:t>
             </a:r>
@@ -15392,7 +14600,7 @@
                 <a:solidFill>
                   <a:srgbClr val="635C6B"/>
                 </a:solidFill>
-                <a:latin typeface="Karla"/>
+                <a:latin typeface="Calibri"/>
               </a:rPr>
               <a:t>Out of ten, right now. Write it in column A.</a:t>
             </a:r>
@@ -15478,11 +14686,11 @@
               </a:spcAft>
             </a:pPr>
             <a:r>
-              <a:rPr sz="1350" b="1" i="0">
+              <a:rPr sz="1350" b="0" i="0">
                 <a:solidFill>
                   <a:srgbClr val="502961"/>
                 </a:solidFill>
-                <a:latin typeface="Libre Caslon Display"/>
+                <a:latin typeface="Georgia"/>
               </a:rPr>
               <a:t>Which one you picked</a:t>
             </a:r>
@@ -15524,7 +14732,7 @@
                 <a:solidFill>
                   <a:srgbClr val="635C6B"/>
                 </a:solidFill>
-                <a:latin typeface="Karla"/>
+                <a:latin typeface="Calibri"/>
               </a:rPr>
               <a:t>You choose on the next slide. Write that down too.</a:t>
             </a:r>
@@ -15566,7 +14774,7 @@
                 <a:solidFill>
                   <a:srgbClr val="502961"/>
                 </a:solidFill>
-                <a:latin typeface="Karla"/>
+                <a:latin typeface="Calibri"/>
               </a:rPr>
               <a:t>If you talk during this, you will get someone else’s number instead of your own and the experiment will not work.</a:t>
             </a:r>
@@ -15632,7 +14840,7 @@
                 <a:solidFill>
                   <a:srgbClr val="9C95A3"/>
                 </a:solidFill>
-                <a:latin typeface="Karla"/>
+                <a:latin typeface="Calibri"/>
               </a:rPr>
               <a:t>The Pastoral Guide</a:t>
             </a:r>
@@ -15674,7 +14882,7 @@
                 <a:solidFill>
                   <a:srgbClr val="9C95A3"/>
                 </a:solidFill>
-                <a:latin typeface="Karla"/>
+                <a:latin typeface="Calibri"/>
               </a:rPr>
               <a:t>5 / 19</a:t>
             </a:r>
@@ -15778,97 +14986,9 @@
                 <a:solidFill>
                   <a:srgbClr val="502961"/>
                 </a:solidFill>
-                <a:latin typeface="Karla"/>
+                <a:latin typeface="Calibri"/>
               </a:rPr>
               <a:t>PICK ONE AND STAY ON IT</a:t>
-            </a:r>
-          </a:p>
-        </p:txBody>
-      </p:sp>
-      <p:sp>
-        <p:nvSpPr>
-          <p:cNvPr id="4" name="Rounded Rectangle 3"/>
-          <p:cNvSpPr/>
-          <p:nvPr/>
-        </p:nvSpPr>
-        <p:spPr>
-          <a:xfrm>
-            <a:off x="7086600" y="530352"/>
-            <a:ext cx="1371600" cy="347472"/>
-          </a:xfrm>
-          <a:prstGeom prst="roundRect">
-            <a:avLst>
-              <a:gd name="adj" fmla="val 50000"/>
-            </a:avLst>
-          </a:prstGeom>
-          <a:solidFill>
-            <a:srgbClr val="F0E4F5"/>
-          </a:solidFill>
-          <a:ln>
-            <a:noFill/>
-          </a:ln>
-          <a:effectLst/>
-        </p:spPr>
-        <p:style>
-          <a:lnRef idx="1">
-            <a:schemeClr val="accent1"/>
-          </a:lnRef>
-          <a:fillRef idx="3">
-            <a:schemeClr val="accent1"/>
-          </a:fillRef>
-          <a:effectRef idx="2">
-            <a:schemeClr val="accent1"/>
-          </a:effectRef>
-          <a:fontRef idx="minor">
-            <a:schemeClr val="lt1"/>
-          </a:fontRef>
-        </p:style>
-        <p:txBody>
-          <a:bodyPr rtlCol="0" anchor="ctr"/>
-          <a:lstStyle/>
-          <a:p>
-            <a:pPr algn="ctr"/>
-          </a:p>
-        </p:txBody>
-      </p:sp>
-      <p:sp>
-        <p:nvSpPr>
-          <p:cNvPr id="5" name="TextBox 4"/>
-          <p:cNvSpPr txBox="1"/>
-          <p:nvPr/>
-        </p:nvSpPr>
-        <p:spPr>
-          <a:xfrm>
-            <a:off x="7086600" y="589788"/>
-            <a:ext cx="1371600" cy="237744"/>
-          </a:xfrm>
-          <a:prstGeom prst="rect">
-            <a:avLst/>
-          </a:prstGeom>
-          <a:noFill/>
-        </p:spPr>
-        <p:txBody>
-          <a:bodyPr wrap="square" lIns="0" rIns="0" tIns="0" bIns="0" anchor="t">
-            <a:spAutoFit/>
-          </a:bodyPr>
-          <a:lstStyle/>
-          <a:p>
-            <a:pPr algn="ctr">
-              <a:lnSpc>
-                <a:spcPct val="125000"/>
-              </a:lnSpc>
-              <a:spcAft>
-                <a:spcPts val="0"/>
-              </a:spcAft>
-            </a:pPr>
-            <a:r>
-              <a:rPr sz="1000" b="1" i="0" spc="100">
-                <a:solidFill>
-                  <a:srgbClr val="502961"/>
-                </a:solidFill>
-                <a:latin typeface="Karla"/>
-              </a:rPr>
-              <a:t>CHOOSE</a:t>
             </a:r>
           </a:p>
         </p:txBody>
@@ -15904,11 +15024,11 @@
               </a:spcAft>
             </a:pPr>
             <a:r>
-              <a:rPr sz="2900" b="1" i="0">
+              <a:rPr sz="2900" b="0" i="0">
                 <a:solidFill>
                   <a:srgbClr val="2F2A36"/>
                 </a:solidFill>
-                <a:latin typeface="Libre Caslon Display"/>
+                <a:latin typeface="Georgia"/>
               </a:rPr>
               <a:t>Choose your five minutes</a:t>
             </a:r>
@@ -15950,7 +15070,7 @@
                 <a:solidFill>
                   <a:srgbClr val="635C6B"/>
                 </a:solidFill>
-                <a:latin typeface="Karla"/>
+                <a:latin typeface="Calibri"/>
               </a:rPr>
               <a:t>The card on your table has the steps. Every one of them has a seated version on it.</a:t>
             </a:r>
@@ -16104,11 +15224,11 @@
               </a:spcAft>
             </a:pPr>
             <a:r>
-              <a:rPr sz="1300" b="1" i="0">
+              <a:rPr sz="1300" b="0" i="0">
                 <a:solidFill>
                   <a:srgbClr val="502961"/>
                 </a:solidFill>
-                <a:latin typeface="Libre Caslon Display"/>
+                <a:latin typeface="Georgia"/>
               </a:rPr>
               <a:t>Bursts</a:t>
             </a:r>
@@ -16150,7 +15270,7 @@
                 <a:solidFill>
                   <a:srgbClr val="502961"/>
                 </a:solidFill>
-                <a:latin typeface="Karla"/>
+                <a:latin typeface="Calibri"/>
               </a:rPr>
               <a:t>Sixty on, ten off, four times.</a:t>
             </a:r>
@@ -16192,7 +15312,7 @@
                 <a:solidFill>
                   <a:srgbClr val="635C6B"/>
                 </a:solidFill>
-                <a:latin typeface="Karla"/>
+                <a:latin typeface="Calibri"/>
               </a:rPr>
               <a:t>Marching, star jumps, or fast feet on the spot.</a:t>
             </a:r>
@@ -16346,11 +15466,11 @@
               </a:spcAft>
             </a:pPr>
             <a:r>
-              <a:rPr sz="1300" b="1" i="0">
+              <a:rPr sz="1300" b="0" i="0">
                 <a:solidFill>
                   <a:srgbClr val="502961"/>
                 </a:solidFill>
-                <a:latin typeface="Libre Caslon Display"/>
+                <a:latin typeface="Georgia"/>
               </a:rPr>
               <a:t>Strength</a:t>
             </a:r>
@@ -16392,7 +15512,7 @@
                 <a:solidFill>
                   <a:srgbClr val="502961"/>
                 </a:solidFill>
-                <a:latin typeface="Karla"/>
+                <a:latin typeface="Calibri"/>
               </a:rPr>
               <a:t>Three sets, slow and controlled.</a:t>
             </a:r>
@@ -16434,7 +15554,7 @@
                 <a:solidFill>
                   <a:srgbClr val="635C6B"/>
                 </a:solidFill>
-                <a:latin typeface="Karla"/>
+                <a:latin typeface="Calibri"/>
               </a:rPr>
               <a:t>Wall press-ups, chair squats, calf raises.</a:t>
             </a:r>
@@ -16588,11 +15708,11 @@
               </a:spcAft>
             </a:pPr>
             <a:r>
-              <a:rPr sz="1300" b="1" i="0">
+              <a:rPr sz="1300" b="0" i="0">
                 <a:solidFill>
                   <a:srgbClr val="502961"/>
                 </a:solidFill>
-                <a:latin typeface="Libre Caslon Display"/>
+                <a:latin typeface="Georgia"/>
               </a:rPr>
               <a:t>Stretch and breathe</a:t>
             </a:r>
@@ -16634,7 +15754,7 @@
                 <a:solidFill>
                   <a:srgbClr val="502961"/>
                 </a:solidFill>
-                <a:latin typeface="Karla"/>
+                <a:latin typeface="Calibri"/>
               </a:rPr>
               <a:t>Quiet, and easy to do seated.</a:t>
             </a:r>
@@ -16676,7 +15796,7 @@
                 <a:solidFill>
                   <a:srgbClr val="635C6B"/>
                 </a:solidFill>
-                <a:latin typeface="Karla"/>
+                <a:latin typeface="Calibri"/>
               </a:rPr>
               <a:t>Long stretches, and four slow breaths between each.</a:t>
             </a:r>
@@ -16718,7 +15838,7 @@
                 <a:solidFill>
                   <a:srgbClr val="502961"/>
                 </a:solidFill>
-                <a:latin typeface="Karla"/>
+                <a:latin typeface="Calibri"/>
               </a:rPr>
               <a:t>Pick the one you would actually do again. That matters more than which is hardest.</a:t>
             </a:r>
@@ -16784,7 +15904,7 @@
                 <a:solidFill>
                   <a:srgbClr val="9C95A3"/>
                 </a:solidFill>
-                <a:latin typeface="Karla"/>
+                <a:latin typeface="Calibri"/>
               </a:rPr>
               <a:t>The Pastoral Guide</a:t>
             </a:r>
@@ -16826,7 +15946,7 @@
                 <a:solidFill>
                   <a:srgbClr val="9C95A3"/>
                 </a:solidFill>
-                <a:latin typeface="Karla"/>
+                <a:latin typeface="Calibri"/>
               </a:rPr>
               <a:t>6 / 19</a:t>
             </a:r>
@@ -16930,97 +16050,9 @@
                 <a:solidFill>
                   <a:srgbClr val="502961"/>
                 </a:solidFill>
-                <a:latin typeface="Karla"/>
+                <a:latin typeface="Calibri"/>
               </a:rPr>
               <a:t>READ THESE, THEN GO</a:t>
-            </a:r>
-          </a:p>
-        </p:txBody>
-      </p:sp>
-      <p:sp>
-        <p:nvSpPr>
-          <p:cNvPr id="4" name="Rounded Rectangle 3"/>
-          <p:cNvSpPr/>
-          <p:nvPr/>
-        </p:nvSpPr>
-        <p:spPr>
-          <a:xfrm>
-            <a:off x="7086600" y="530352"/>
-            <a:ext cx="1371600" cy="347472"/>
-          </a:xfrm>
-          <a:prstGeom prst="roundRect">
-            <a:avLst>
-              <a:gd name="adj" fmla="val 50000"/>
-            </a:avLst>
-          </a:prstGeom>
-          <a:solidFill>
-            <a:srgbClr val="F0E4F5"/>
-          </a:solidFill>
-          <a:ln>
-            <a:noFill/>
-          </a:ln>
-          <a:effectLst/>
-        </p:spPr>
-        <p:style>
-          <a:lnRef idx="1">
-            <a:schemeClr val="accent1"/>
-          </a:lnRef>
-          <a:fillRef idx="3">
-            <a:schemeClr val="accent1"/>
-          </a:fillRef>
-          <a:effectRef idx="2">
-            <a:schemeClr val="accent1"/>
-          </a:effectRef>
-          <a:fontRef idx="minor">
-            <a:schemeClr val="lt1"/>
-          </a:fontRef>
-        </p:style>
-        <p:txBody>
-          <a:bodyPr rtlCol="0" anchor="ctr"/>
-          <a:lstStyle/>
-          <a:p>
-            <a:pPr algn="ctr"/>
-          </a:p>
-        </p:txBody>
-      </p:sp>
-      <p:sp>
-        <p:nvSpPr>
-          <p:cNvPr id="5" name="TextBox 4"/>
-          <p:cNvSpPr txBox="1"/>
-          <p:nvPr/>
-        </p:nvSpPr>
-        <p:spPr>
-          <a:xfrm>
-            <a:off x="7086600" y="589788"/>
-            <a:ext cx="1371600" cy="237744"/>
-          </a:xfrm>
-          <a:prstGeom prst="rect">
-            <a:avLst/>
-          </a:prstGeom>
-          <a:noFill/>
-        </p:spPr>
-        <p:txBody>
-          <a:bodyPr wrap="square" lIns="0" rIns="0" tIns="0" bIns="0" anchor="t">
-            <a:spAutoFit/>
-          </a:bodyPr>
-          <a:lstStyle/>
-          <a:p>
-            <a:pPr algn="ctr">
-              <a:lnSpc>
-                <a:spcPct val="125000"/>
-              </a:lnSpc>
-              <a:spcAft>
-                <a:spcPts val="0"/>
-              </a:spcAft>
-            </a:pPr>
-            <a:r>
-              <a:rPr sz="1000" b="1" i="0" spc="100">
-                <a:solidFill>
-                  <a:srgbClr val="502961"/>
-                </a:solidFill>
-                <a:latin typeface="Karla"/>
-              </a:rPr>
-              <a:t>READY</a:t>
             </a:r>
           </a:p>
         </p:txBody>
@@ -17056,11 +16088,11 @@
               </a:spcAft>
             </a:pPr>
             <a:r>
-              <a:rPr sz="3100" b="1" i="0">
+              <a:rPr sz="3100" b="0" i="0">
                 <a:solidFill>
                   <a:srgbClr val="2F2A36"/>
                 </a:solidFill>
-                <a:latin typeface="Libre Caslon Display"/>
+                <a:latin typeface="Georgia"/>
               </a:rPr>
               <a:t>Four rules for five minutes</a:t>
             </a:r>
@@ -17190,11 +16222,11 @@
               </a:spcAft>
             </a:pPr>
             <a:r>
-              <a:rPr sz="1200" b="1" i="0">
+              <a:rPr sz="1200" b="0" i="0">
                 <a:solidFill>
                   <a:srgbClr val="FFFDF7"/>
                 </a:solidFill>
-                <a:latin typeface="Libre Caslon Display"/>
+                <a:latin typeface="Georgia"/>
               </a:rPr>
               <a:t>1</a:t>
             </a:r>
@@ -17236,7 +16268,7 @@
                 <a:solidFill>
                   <a:srgbClr val="2F2A36"/>
                 </a:solidFill>
-                <a:latin typeface="Karla"/>
+                <a:latin typeface="Calibri"/>
               </a:rPr>
               <a:t>Follow your card, not the person next to you.</a:t>
             </a:r>
@@ -17366,11 +16398,11 @@
               </a:spcAft>
             </a:pPr>
             <a:r>
-              <a:rPr sz="1200" b="1" i="0">
+              <a:rPr sz="1200" b="0" i="0">
                 <a:solidFill>
                   <a:srgbClr val="FFFDF7"/>
                 </a:solidFill>
-                <a:latin typeface="Libre Caslon Display"/>
+                <a:latin typeface="Georgia"/>
               </a:rPr>
               <a:t>2</a:t>
             </a:r>
@@ -17412,7 +16444,7 @@
                 <a:solidFill>
                   <a:srgbClr val="2F2A36"/>
                 </a:solidFill>
-                <a:latin typeface="Karla"/>
+                <a:latin typeface="Calibri"/>
               </a:rPr>
               <a:t>Moderate is the target. You should be able to talk, but not sing.</a:t>
             </a:r>
@@ -17542,11 +16574,11 @@
               </a:spcAft>
             </a:pPr>
             <a:r>
-              <a:rPr sz="1200" b="1" i="0">
+              <a:rPr sz="1200" b="0" i="0">
                 <a:solidFill>
                   <a:srgbClr val="FFFDF7"/>
                 </a:solidFill>
-                <a:latin typeface="Libre Caslon Display"/>
+                <a:latin typeface="Georgia"/>
               </a:rPr>
               <a:t>3</a:t>
             </a:r>
@@ -17588,7 +16620,7 @@
                 <a:solidFill>
                   <a:srgbClr val="2F2A36"/>
                 </a:solidFill>
-                <a:latin typeface="Karla"/>
+                <a:latin typeface="Calibri"/>
               </a:rPr>
               <a:t>If it hurts or you feel dizzy, sit down. That is always the right thing to do.</a:t>
             </a:r>
@@ -17718,11 +16750,11 @@
               </a:spcAft>
             </a:pPr>
             <a:r>
-              <a:rPr sz="1200" b="1" i="0">
+              <a:rPr sz="1200" b="0" i="0">
                 <a:solidFill>
                   <a:srgbClr val="FFFDF7"/>
                 </a:solidFill>
-                <a:latin typeface="Libre Caslon Display"/>
+                <a:latin typeface="Georgia"/>
               </a:rPr>
               <a:t>4</a:t>
             </a:r>
@@ -17764,7 +16796,7 @@
                 <a:solidFill>
                   <a:srgbClr val="2F2A36"/>
                 </a:solidFill>
-                <a:latin typeface="Karla"/>
+                <a:latin typeface="Calibri"/>
               </a:rPr>
               <a:t>Do not stop early to compare numbers. Measuring comes after.</a:t>
             </a:r>
@@ -17806,7 +16838,7 @@
                 <a:solidFill>
                   <a:srgbClr val="502961"/>
                 </a:solidFill>
-                <a:latin typeface="Karla"/>
+                <a:latin typeface="Calibri"/>
               </a:rPr>
               <a:t>Nobody has to be good at this. You only have to keep going for five minutes.</a:t>
             </a:r>
@@ -17872,7 +16904,7 @@
                 <a:solidFill>
                   <a:srgbClr val="9C95A3"/>
                 </a:solidFill>
-                <a:latin typeface="Karla"/>
+                <a:latin typeface="Calibri"/>
               </a:rPr>
               <a:t>The Pastoral Guide</a:t>
             </a:r>
@@ -17914,7 +16946,7 @@
                 <a:solidFill>
                   <a:srgbClr val="9C95A3"/>
                 </a:solidFill>
-                <a:latin typeface="Karla"/>
+                <a:latin typeface="Calibri"/>
               </a:rPr>
               <a:t>7 / 19</a:t>
             </a:r>
@@ -18018,97 +17050,9 @@
                 <a:solidFill>
                   <a:srgbClr val="D8BCE4"/>
                 </a:solidFill>
-                <a:latin typeface="Karla"/>
+                <a:latin typeface="Calibri"/>
               </a:rPr>
               <a:t>GO</a:t>
-            </a:r>
-          </a:p>
-        </p:txBody>
-      </p:sp>
-      <p:sp>
-        <p:nvSpPr>
-          <p:cNvPr id="4" name="Rounded Rectangle 3"/>
-          <p:cNvSpPr/>
-          <p:nvPr/>
-        </p:nvSpPr>
-        <p:spPr>
-          <a:xfrm>
-            <a:off x="7086600" y="530352"/>
-            <a:ext cx="1371600" cy="347472"/>
-          </a:xfrm>
-          <a:prstGeom prst="roundRect">
-            <a:avLst>
-              <a:gd name="adj" fmla="val 50000"/>
-            </a:avLst>
-          </a:prstGeom>
-          <a:solidFill>
-            <a:srgbClr val="FFFDF7"/>
-          </a:solidFill>
-          <a:ln>
-            <a:noFill/>
-          </a:ln>
-          <a:effectLst/>
-        </p:spPr>
-        <p:style>
-          <a:lnRef idx="1">
-            <a:schemeClr val="accent1"/>
-          </a:lnRef>
-          <a:fillRef idx="3">
-            <a:schemeClr val="accent1"/>
-          </a:fillRef>
-          <a:effectRef idx="2">
-            <a:schemeClr val="accent1"/>
-          </a:effectRef>
-          <a:fontRef idx="minor">
-            <a:schemeClr val="lt1"/>
-          </a:fontRef>
-        </p:style>
-        <p:txBody>
-          <a:bodyPr rtlCol="0" anchor="ctr"/>
-          <a:lstStyle/>
-          <a:p>
-            <a:pPr algn="ctr"/>
-          </a:p>
-        </p:txBody>
-      </p:sp>
-      <p:sp>
-        <p:nvSpPr>
-          <p:cNvPr id="5" name="TextBox 4"/>
-          <p:cNvSpPr txBox="1"/>
-          <p:nvPr/>
-        </p:nvSpPr>
-        <p:spPr>
-          <a:xfrm>
-            <a:off x="7086600" y="589788"/>
-            <a:ext cx="1371600" cy="237744"/>
-          </a:xfrm>
-          <a:prstGeom prst="rect">
-            <a:avLst/>
-          </a:prstGeom>
-          <a:noFill/>
-        </p:spPr>
-        <p:txBody>
-          <a:bodyPr wrap="square" lIns="0" rIns="0" tIns="0" bIns="0" anchor="t">
-            <a:spAutoFit/>
-          </a:bodyPr>
-          <a:lstStyle/>
-          <a:p>
-            <a:pPr algn="ctr">
-              <a:lnSpc>
-                <a:spcPct val="125000"/>
-              </a:lnSpc>
-              <a:spcAft>
-                <a:spcPts val="0"/>
-              </a:spcAft>
-            </a:pPr>
-            <a:r>
-              <a:rPr sz="1000" b="1" i="0" spc="100">
-                <a:solidFill>
-                  <a:srgbClr val="502961"/>
-                </a:solidFill>
-                <a:latin typeface="Karla"/>
-              </a:rPr>
-              <a:t>MOVE</a:t>
             </a:r>
           </a:p>
         </p:txBody>
@@ -18144,11 +17088,11 @@
               </a:spcAft>
             </a:pPr>
             <a:r>
-              <a:rPr sz="4400" b="1" i="0">
+              <a:rPr sz="4400" b="0" i="0">
                 <a:solidFill>
                   <a:srgbClr val="FFFDF7"/>
                 </a:solidFill>
-                <a:latin typeface="Libre Caslon Display"/>
+                <a:latin typeface="Georgia"/>
               </a:rPr>
               <a:t>Five minutes</a:t>
             </a:r>
@@ -18238,7 +17182,7 @@
                 <a:solidFill>
                   <a:srgbClr val="502961"/>
                 </a:solidFill>
-                <a:latin typeface="Karla"/>
+                <a:latin typeface="Calibri"/>
               </a:rPr>
               <a:t>Start when your teacher says. Not before.</a:t>
             </a:r>
@@ -18328,7 +17272,7 @@
                 <a:solidFill>
                   <a:srgbClr val="502961"/>
                 </a:solidFill>
-                <a:latin typeface="Karla"/>
+                <a:latin typeface="Calibri"/>
               </a:rPr>
               <a:t>Keep going. Slow down if you need to. Stop if it hurts.</a:t>
             </a:r>
@@ -18418,7 +17362,7 @@
                 <a:solidFill>
                   <a:srgbClr val="502961"/>
                 </a:solidFill>
-                <a:latin typeface="Karla"/>
+                <a:latin typeface="Calibri"/>
               </a:rPr>
               <a:t>Do not measure anything until the five minutes are up.</a:t>
             </a:r>
@@ -18552,7 +17496,7 @@
                 <a:solidFill>
                   <a:srgbClr val="D8BCE4"/>
                 </a:solidFill>
-                <a:latin typeface="Karla"/>
+                <a:latin typeface="Calibri"/>
               </a:rPr>
               <a:t>The Pastoral Guide</a:t>
             </a:r>
@@ -18594,7 +17538,7 @@
                 <a:solidFill>
                   <a:srgbClr val="D8BCE4"/>
                 </a:solidFill>
-                <a:latin typeface="Karla"/>
+                <a:latin typeface="Calibri"/>
               </a:rPr>
               <a:t>8 / 19</a:t>
             </a:r>
@@ -18698,97 +17642,9 @@
                 <a:solidFill>
                   <a:srgbClr val="502961"/>
                 </a:solidFill>
-                <a:latin typeface="Karla"/>
+                <a:latin typeface="Calibri"/>
               </a:rPr>
               <a:t>COLUMN B, STRAIGHT AWAY</a:t>
-            </a:r>
-          </a:p>
-        </p:txBody>
-      </p:sp>
-      <p:sp>
-        <p:nvSpPr>
-          <p:cNvPr id="4" name="Rounded Rectangle 3"/>
-          <p:cNvSpPr/>
-          <p:nvPr/>
-        </p:nvSpPr>
-        <p:spPr>
-          <a:xfrm>
-            <a:off x="7086600" y="530352"/>
-            <a:ext cx="1371600" cy="347472"/>
-          </a:xfrm>
-          <a:prstGeom prst="roundRect">
-            <a:avLst>
-              <a:gd name="adj" fmla="val 50000"/>
-            </a:avLst>
-          </a:prstGeom>
-          <a:solidFill>
-            <a:srgbClr val="F0E4F5"/>
-          </a:solidFill>
-          <a:ln>
-            <a:noFill/>
-          </a:ln>
-          <a:effectLst/>
-        </p:spPr>
-        <p:style>
-          <a:lnRef idx="1">
-            <a:schemeClr val="accent1"/>
-          </a:lnRef>
-          <a:fillRef idx="3">
-            <a:schemeClr val="accent1"/>
-          </a:fillRef>
-          <a:effectRef idx="2">
-            <a:schemeClr val="accent1"/>
-          </a:effectRef>
-          <a:fontRef idx="minor">
-            <a:schemeClr val="lt1"/>
-          </a:fontRef>
-        </p:style>
-        <p:txBody>
-          <a:bodyPr rtlCol="0" anchor="ctr"/>
-          <a:lstStyle/>
-          <a:p>
-            <a:pPr algn="ctr"/>
-          </a:p>
-        </p:txBody>
-      </p:sp>
-      <p:sp>
-        <p:nvSpPr>
-          <p:cNvPr id="5" name="TextBox 4"/>
-          <p:cNvSpPr txBox="1"/>
-          <p:nvPr/>
-        </p:nvSpPr>
-        <p:spPr>
-          <a:xfrm>
-            <a:off x="7086600" y="589788"/>
-            <a:ext cx="1371600" cy="237744"/>
-          </a:xfrm>
-          <a:prstGeom prst="rect">
-            <a:avLst/>
-          </a:prstGeom>
-          <a:noFill/>
-        </p:spPr>
-        <p:txBody>
-          <a:bodyPr wrap="square" lIns="0" rIns="0" tIns="0" bIns="0" anchor="t">
-            <a:spAutoFit/>
-          </a:bodyPr>
-          <a:lstStyle/>
-          <a:p>
-            <a:pPr algn="ctr">
-              <a:lnSpc>
-                <a:spcPct val="125000"/>
-              </a:lnSpc>
-              <a:spcAft>
-                <a:spcPts val="0"/>
-              </a:spcAft>
-            </a:pPr>
-            <a:r>
-              <a:rPr sz="1000" b="1" i="0" spc="100">
-                <a:solidFill>
-                  <a:srgbClr val="502961"/>
-                </a:solidFill>
-                <a:latin typeface="Karla"/>
-              </a:rPr>
-              <a:t>MEASURE</a:t>
             </a:r>
           </a:p>
         </p:txBody>
@@ -18824,11 +17680,11 @@
               </a:spcAft>
             </a:pPr>
             <a:r>
-              <a:rPr sz="3200" b="1" i="0">
+              <a:rPr sz="3200" b="0" i="0">
                 <a:solidFill>
                   <a:srgbClr val="2F2A36"/>
                 </a:solidFill>
-                <a:latin typeface="Libre Caslon Display"/>
+                <a:latin typeface="Georgia"/>
               </a:rPr>
               <a:t>Now, before you talk</a:t>
             </a:r>
@@ -18870,7 +17726,7 @@
                 <a:solidFill>
                   <a:srgbClr val="635C6B"/>
                 </a:solidFill>
-                <a:latin typeface="Karla"/>
+                <a:latin typeface="Calibri"/>
               </a:rPr>
               <a:t>Sit down and measure immediately. Waiting two minutes changes the answer.</a:t>
             </a:r>
@@ -18956,11 +17812,11 @@
               </a:spcAft>
             </a:pPr>
             <a:r>
-              <a:rPr sz="1350" b="1" i="0">
+              <a:rPr sz="1350" b="0" i="0">
                 <a:solidFill>
                   <a:srgbClr val="502961"/>
                 </a:solidFill>
-                <a:latin typeface="Libre Caslon Display"/>
+                <a:latin typeface="Georgia"/>
               </a:rPr>
               <a:t>Pulse</a:t>
             </a:r>
@@ -19002,7 +17858,7 @@
                 <a:solidFill>
                   <a:srgbClr val="635C6B"/>
                 </a:solidFill>
-                <a:latin typeface="Karla"/>
+                <a:latin typeface="Calibri"/>
               </a:rPr>
               <a:t>Fifteen seconds, times four. Column B.</a:t>
             </a:r>
@@ -19088,11 +17944,11 @@
               </a:spcAft>
             </a:pPr>
             <a:r>
-              <a:rPr sz="1350" b="1" i="0">
+              <a:rPr sz="1350" b="0" i="0">
                 <a:solidFill>
                   <a:srgbClr val="502961"/>
                 </a:solidFill>
-                <a:latin typeface="Libre Caslon Display"/>
+                <a:latin typeface="Georgia"/>
               </a:rPr>
               <a:t>Focus</a:t>
             </a:r>
@@ -19134,7 +17990,7 @@
                 <a:solidFill>
                   <a:srgbClr val="635C6B"/>
                 </a:solidFill>
-                <a:latin typeface="Karla"/>
+                <a:latin typeface="Calibri"/>
               </a:rPr>
               <a:t>Out of ten, honestly. Column B.</a:t>
             </a:r>
@@ -19220,11 +18076,11 @@
               </a:spcAft>
             </a:pPr>
             <a:r>
-              <a:rPr sz="1350" b="1" i="0">
+              <a:rPr sz="1350" b="0" i="0">
                 <a:solidFill>
                   <a:srgbClr val="502961"/>
                 </a:solidFill>
-                <a:latin typeface="Libre Caslon Display"/>
+                <a:latin typeface="Georgia"/>
               </a:rPr>
               <a:t>One word</a:t>
             </a:r>
@@ -19266,7 +18122,7 @@
                 <a:solidFill>
                   <a:srgbClr val="635C6B"/>
                 </a:solidFill>
-                <a:latin typeface="Karla"/>
+                <a:latin typeface="Calibri"/>
               </a:rPr>
               <a:t>How do you feel? Write the first word you think of.</a:t>
             </a:r>
@@ -19308,7 +18164,7 @@
                 <a:solidFill>
                   <a:srgbClr val="502961"/>
                 </a:solidFill>
-                <a:latin typeface="Karla"/>
+                <a:latin typeface="Calibri"/>
               </a:rPr>
               <a:t>The one word is the useful part: your first reaction is the most honest one.</a:t>
             </a:r>
@@ -19374,7 +18230,7 @@
                 <a:solidFill>
                   <a:srgbClr val="9C95A3"/>
                 </a:solidFill>
-                <a:latin typeface="Karla"/>
+                <a:latin typeface="Calibri"/>
               </a:rPr>
               <a:t>The Pastoral Guide</a:t>
             </a:r>
@@ -19416,7 +18272,7 @@
                 <a:solidFill>
                   <a:srgbClr val="9C95A3"/>
                 </a:solidFill>
-                <a:latin typeface="Karla"/>
+                <a:latin typeface="Calibri"/>
               </a:rPr>
               <a:t>9 / 19</a:t>
             </a:r>

--- a/tutor-time/movement-and-mental-health/downloads/Movement_and_Mental_Health_Lesson_2.pptx
+++ b/tutor-time/movement-and-mental-health/downloads/Movement_and_Mental_Health_Lesson_2.pptx
@@ -8836,7 +8836,7 @@
                 </a:solidFill>
                 <a:latin typeface="Calibri"/>
               </a:rPr>
-              <a:t>THE ONLY QUESTION THAT MATTERS</a:t>
+              <a:t>BEFORE NEXT LESSON</a:t>
             </a:r>
           </a:p>
         </p:txBody>
